--- a/Sales Prediction Analysis.pptx
+++ b/Sales Prediction Analysis.pptx
@@ -13,9 +13,9 @@
     <p:sldId id="258" r:id="rId4"/>
     <p:sldId id="259" r:id="rId5"/>
     <p:sldId id="260" r:id="rId6"/>
-    <p:sldId id="266" r:id="rId7"/>
-    <p:sldId id="261" r:id="rId8"/>
-    <p:sldId id="262" r:id="rId9"/>
+    <p:sldId id="261" r:id="rId7"/>
+    <p:sldId id="262" r:id="rId8"/>
+    <p:sldId id="263" r:id="rId9"/>
     <p:sldId id="264" r:id="rId10"/>
     <p:sldId id="265" r:id="rId11"/>
   </p:sldIdLst>
@@ -824,7 +824,7 @@
     </p:spTree>
     <p:extLst>
       <p:ext uri="{BB962C8B-B14F-4D97-AF65-F5344CB8AC3E}">
-        <p14:creationId xmlns:p14="http://schemas.microsoft.com/office/powerpoint/2010/main" val="213393937"/>
+        <p14:creationId xmlns:p14="http://schemas.microsoft.com/office/powerpoint/2010/main" val="1024086991"/>
       </p:ext>
     </p:extLst>
   </p:cSld>
@@ -1431,7 +1431,7 @@
         </p:blipFill>
         <p:spPr>
           <a:xfrm>
-            <a:off x="0" y="-80962"/>
+            <a:off x="0" y="0"/>
             <a:ext cx="9144000" cy="5143500"/>
           </a:xfrm>
           <a:prstGeom prst="rect">
@@ -1467,7 +1467,7 @@
               <a:buNone/>
             </a:pPr>
             <a:r>
-              <a:rPr lang="en-US" sz="4500" b="1" dirty="0" smtClean="0">
+              <a:rPr lang="en-US" sz="4500" b="1" dirty="0">
                 <a:solidFill>
                   <a:srgbClr val="FFFFFF"/>
                 </a:solidFill>
@@ -1475,7 +1475,7 @@
                 <a:ea typeface="Arial" pitchFamily="34" charset="-122"/>
                 <a:cs typeface="Arial" pitchFamily="34" charset="-120"/>
               </a:rPr>
-              <a:t>Wine Quality Analysis</a:t>
+              <a:t>Sales Prediction Analysis</a:t>
             </a:r>
             <a:endParaRPr lang="en-US" sz="4500" dirty="0"/>
           </a:p>
@@ -1489,8 +1489,8 @@
         </p:nvSpPr>
         <p:spPr>
           <a:xfrm>
-            <a:off x="2290226" y="2490788"/>
-            <a:ext cx="4563397" cy="266700"/>
+            <a:off x="2692659" y="2490788"/>
+            <a:ext cx="3758532" cy="266700"/>
           </a:xfrm>
           <a:prstGeom prst="rect">
             <a:avLst/>
@@ -1509,7 +1509,7 @@
               <a:buNone/>
             </a:pPr>
             <a:r>
-              <a:rPr lang="en-US" sz="1800" dirty="0" smtClean="0">
+              <a:rPr lang="en-US" sz="1800" dirty="0">
                 <a:solidFill>
                   <a:srgbClr val="E0E7FF"/>
                 </a:solidFill>
@@ -1517,7 +1517,7 @@
                 <a:ea typeface="Arial" pitchFamily="34" charset="-122"/>
                 <a:cs typeface="Arial" pitchFamily="34" charset="-120"/>
               </a:rPr>
-              <a:t>Different Factors’ Impact on Quality of Wine</a:t>
+              <a:t>Advertising Impact on Product Sales</a:t>
             </a:r>
             <a:endParaRPr lang="en-US" sz="1800" dirty="0"/>
           </a:p>
@@ -1844,7 +1844,7 @@
         <p:spPr>
           <a:xfrm>
             <a:off x="914400" y="2102941"/>
-            <a:ext cx="7315200" cy="571500"/>
+            <a:ext cx="7315200" cy="342900"/>
           </a:xfrm>
           <a:prstGeom prst="rect">
             <a:avLst/>
@@ -1856,73 +1856,24 @@
           <a:bodyPr wrap="square" lIns="0" tIns="0" rIns="0" bIns="0" rtlCol="0" anchor="t"/>
           <a:lstStyle/>
           <a:p>
-            <a:pPr>
+            <a:pPr marL="0" indent="0">
               <a:lnSpc>
                 <a:spcPts val="1080"/>
               </a:lnSpc>
-            </a:pPr>
-            <a:r>
-              <a:rPr lang="en-US" sz="1600" dirty="0">
-                <a:solidFill>
-                  <a:schemeClr val="bg1"/>
-                </a:solidFill>
-                <a:latin typeface="Arial Rounded MT Bold" panose="020F0704030504030204" pitchFamily="34" charset="0"/>
-              </a:rPr>
-              <a:t>The wine dataset includes features like fixed acidity, volatile acidity</a:t>
-            </a:r>
-            <a:r>
-              <a:rPr lang="en-US" sz="1600" dirty="0" smtClean="0">
-                <a:solidFill>
-                  <a:schemeClr val="bg1"/>
-                </a:solidFill>
-                <a:latin typeface="Arial Rounded MT Bold" panose="020F0704030504030204" pitchFamily="34" charset="0"/>
-              </a:rPr>
-              <a:t>,</a:t>
-            </a:r>
-          </a:p>
-          <a:p>
-            <a:pPr>
-              <a:lnSpc>
-                <a:spcPts val="1080"/>
-              </a:lnSpc>
-            </a:pPr>
-            <a:endParaRPr lang="en-US" sz="1600" dirty="0">
-              <a:solidFill>
-                <a:schemeClr val="bg1"/>
-              </a:solidFill>
-              <a:latin typeface="Arial Rounded MT Bold" panose="020F0704030504030204" pitchFamily="34" charset="0"/>
-            </a:endParaRPr>
-          </a:p>
-          <a:p>
-            <a:pPr>
-              <a:lnSpc>
-                <a:spcPts val="1080"/>
-              </a:lnSpc>
-            </a:pPr>
-            <a:r>
-              <a:rPr lang="en-US" sz="1600" dirty="0" smtClean="0">
-                <a:solidFill>
-                  <a:schemeClr val="bg1"/>
-                </a:solidFill>
-                <a:latin typeface="Arial Rounded MT Bold" panose="020F0704030504030204" pitchFamily="34" charset="0"/>
-              </a:rPr>
-              <a:t> </a:t>
-            </a:r>
-            <a:r>
-              <a:rPr lang="en-US" sz="1600" dirty="0">
-                <a:solidFill>
-                  <a:schemeClr val="bg1"/>
-                </a:solidFill>
-                <a:latin typeface="Arial Rounded MT Bold" panose="020F0704030504030204" pitchFamily="34" charset="0"/>
-              </a:rPr>
-              <a:t>residual sugar, alcohol, and quality scores ranging from 3 to 8.</a:t>
-            </a:r>
-            <a:endParaRPr lang="en-US" sz="1600" dirty="0">
-              <a:solidFill>
-                <a:schemeClr val="bg1"/>
-              </a:solidFill>
-              <a:latin typeface="Arial Rounded MT Bold" panose="020F0704030504030204" pitchFamily="34" charset="0"/>
-            </a:endParaRPr>
+              <a:buNone/>
+            </a:pPr>
+            <a:r>
+              <a:rPr lang="en-US" sz="1200" dirty="0">
+                <a:solidFill>
+                  <a:srgbClr val="CBD5E1"/>
+                </a:solidFill>
+                <a:latin typeface="Arial" pitchFamily="34" charset="0"/>
+                <a:ea typeface="Arial" pitchFamily="34" charset="-122"/>
+                <a:cs typeface="Arial" pitchFamily="34" charset="-120"/>
+              </a:rPr>
+              <a:t>Advertising sales data with 200 records analyzing TV, Radio, and Newspaper advertising expenditure against product sales.</a:t>
+            </a:r>
+            <a:endParaRPr lang="en-US" sz="1200" dirty="0"/>
           </a:p>
         </p:txBody>
       </p:sp>
@@ -1934,7 +1885,7 @@
         </p:nvSpPr>
         <p:spPr>
           <a:xfrm>
-            <a:off x="914400" y="3252669"/>
+            <a:off x="914400" y="3348930"/>
             <a:ext cx="7461504" cy="319980"/>
           </a:xfrm>
           <a:prstGeom prst="rect">
@@ -1976,8 +1927,8 @@
         </p:nvSpPr>
         <p:spPr>
           <a:xfrm>
-            <a:off x="914400" y="3736923"/>
-            <a:ext cx="7315200" cy="632702"/>
+            <a:off x="914400" y="3821311"/>
+            <a:ext cx="7315200" cy="342900"/>
           </a:xfrm>
           <a:prstGeom prst="rect">
             <a:avLst/>
@@ -1989,95 +1940,24 @@
           <a:bodyPr wrap="square" lIns="0" tIns="0" rIns="0" bIns="0" rtlCol="0" anchor="t"/>
           <a:lstStyle/>
           <a:p>
-            <a:pPr>
+            <a:pPr marL="0" indent="0">
               <a:lnSpc>
                 <a:spcPts val="1080"/>
               </a:lnSpc>
-            </a:pPr>
-            <a:r>
-              <a:rPr lang="en-US" sz="1600" dirty="0">
-                <a:solidFill>
-                  <a:schemeClr val="bg1"/>
-                </a:solidFill>
-                <a:latin typeface="Arial Rounded MT Bold" panose="020F0704030504030204" pitchFamily="34" charset="0"/>
-              </a:rPr>
-              <a:t>Most frequent quality is 5, appearing as the mode across samples</a:t>
-            </a:r>
-            <a:r>
-              <a:rPr lang="en-US" sz="1600" dirty="0" smtClean="0">
-                <a:solidFill>
-                  <a:schemeClr val="bg1"/>
-                </a:solidFill>
-                <a:latin typeface="Arial Rounded MT Bold" panose="020F0704030504030204" pitchFamily="34" charset="0"/>
-              </a:rPr>
-              <a:t>.</a:t>
-            </a:r>
-          </a:p>
-          <a:p>
-            <a:pPr>
-              <a:lnSpc>
-                <a:spcPts val="1080"/>
-              </a:lnSpc>
-            </a:pPr>
-            <a:r>
-              <a:rPr lang="en-US" sz="1600" dirty="0" smtClean="0">
-                <a:solidFill>
-                  <a:schemeClr val="bg1"/>
-                </a:solidFill>
-                <a:latin typeface="Arial Rounded MT Bold" panose="020F0704030504030204" pitchFamily="34" charset="0"/>
-              </a:rPr>
-              <a:t>​</a:t>
-            </a:r>
-            <a:r>
-              <a:rPr lang="en-US" sz="1600" dirty="0">
-                <a:solidFill>
-                  <a:schemeClr val="bg1"/>
-                </a:solidFill>
-                <a:latin typeface="Arial Rounded MT Bold" panose="020F0704030504030204" pitchFamily="34" charset="0"/>
-              </a:rPr>
-              <a:t/>
-            </a:r>
-            <a:br>
-              <a:rPr lang="en-US" sz="1600" dirty="0">
-                <a:solidFill>
-                  <a:schemeClr val="bg1"/>
-                </a:solidFill>
-                <a:latin typeface="Arial Rounded MT Bold" panose="020F0704030504030204" pitchFamily="34" charset="0"/>
-              </a:rPr>
-            </a:br>
-            <a:r>
-              <a:rPr lang="en-US" sz="1600" dirty="0">
-                <a:solidFill>
-                  <a:schemeClr val="bg1"/>
-                </a:solidFill>
-                <a:latin typeface="Arial Rounded MT Bold" panose="020F0704030504030204" pitchFamily="34" charset="0"/>
-              </a:rPr>
-              <a:t>Data is split into training/testing sets with </a:t>
-            </a:r>
-            <a:r>
-              <a:rPr lang="en-US" sz="1600" dirty="0" err="1">
-                <a:solidFill>
-                  <a:schemeClr val="bg1"/>
-                </a:solidFill>
-                <a:latin typeface="Arial Rounded MT Bold" panose="020F0704030504030204" pitchFamily="34" charset="0"/>
-              </a:rPr>
-              <a:t>StandardScaler</a:t>
-            </a:r>
-            <a:r>
-              <a:rPr lang="en-US" sz="1600" dirty="0">
-                <a:solidFill>
-                  <a:schemeClr val="bg1"/>
-                </a:solidFill>
-                <a:latin typeface="Arial Rounded MT Bold" panose="020F0704030504030204" pitchFamily="34" charset="0"/>
-              </a:rPr>
-              <a:t> for preprocessing.</a:t>
-            </a:r>
-            <a:endParaRPr lang="en-US" sz="1600" dirty="0">
-              <a:solidFill>
-                <a:schemeClr val="bg1"/>
-              </a:solidFill>
-              <a:latin typeface="Arial Rounded MT Bold" panose="020F0704030504030204" pitchFamily="34" charset="0"/>
-            </a:endParaRPr>
+              <a:buNone/>
+            </a:pPr>
+            <a:r>
+              <a:rPr lang="en-US" sz="1200" dirty="0">
+                <a:solidFill>
+                  <a:srgbClr val="CBD5E1"/>
+                </a:solidFill>
+                <a:latin typeface="Arial" pitchFamily="34" charset="0"/>
+                <a:ea typeface="Arial" pitchFamily="34" charset="-122"/>
+                <a:cs typeface="Arial" pitchFamily="34" charset="-120"/>
+              </a:rPr>
+              <a:t>Multiple Linear Regression model to predict sales based on advertising spending across three media channels.</a:t>
+            </a:r>
+            <a:endParaRPr lang="en-US" sz="1200" dirty="0"/>
           </a:p>
         </p:txBody>
       </p:sp>
@@ -2122,8 +2002,8 @@
         </p:nvSpPr>
         <p:spPr>
           <a:xfrm>
-            <a:off x="305095" y="1852954"/>
-            <a:ext cx="4089924" cy="496809"/>
+            <a:off x="324465" y="1571260"/>
+            <a:ext cx="4434643" cy="1096577"/>
           </a:xfrm>
           <a:prstGeom prst="rect">
             <a:avLst/>
@@ -2174,8 +2054,8 @@
         </p:nvSpPr>
         <p:spPr>
           <a:xfrm>
-            <a:off x="4778773" y="1852954"/>
-            <a:ext cx="4089925" cy="496809"/>
+            <a:off x="324465" y="2979174"/>
+            <a:ext cx="4434643" cy="1309128"/>
           </a:xfrm>
           <a:prstGeom prst="rect">
             <a:avLst/>
@@ -2239,10 +2119,11 @@
           <a:bodyPr wrap="square" lIns="0" tIns="0" rIns="0" bIns="0" rtlCol="0" anchor="t"/>
           <a:lstStyle/>
           <a:p>
-            <a:pPr>
+            <a:pPr marL="0" indent="0">
               <a:lnSpc>
                 <a:spcPts val="3240"/>
               </a:lnSpc>
+              <a:buNone/>
             </a:pPr>
             <a:r>
               <a:rPr lang="en-US" sz="2700" b="1" dirty="0">
@@ -2253,40 +2134,8 @@
                 <a:ea typeface="Arial" pitchFamily="34" charset="-122"/>
                 <a:cs typeface="Arial" pitchFamily="34" charset="-120"/>
               </a:rPr>
-              <a:t>Q1: </a:t>
-            </a:r>
-            <a:r>
-              <a:rPr lang="en-US" sz="2800" dirty="0">
-                <a:solidFill>
-                  <a:schemeClr val="bg1"/>
-                </a:solidFill>
-              </a:rPr>
-              <a:t>Finding the most frequently </a:t>
-            </a:r>
-            <a:r>
-              <a:rPr lang="en-US" sz="2800" dirty="0" err="1">
-                <a:solidFill>
-                  <a:schemeClr val="bg1"/>
-                </a:solidFill>
-              </a:rPr>
-              <a:t>occuring</a:t>
-            </a:r>
-            <a:r>
-              <a:rPr lang="en-US" sz="2800" dirty="0">
-                <a:solidFill>
-                  <a:schemeClr val="bg1"/>
-                </a:solidFill>
-              </a:rPr>
-              <a:t>, minimum and maximum quality.</a:t>
-            </a:r>
-          </a:p>
-          <a:p>
-            <a:pPr marL="0" indent="0">
-              <a:lnSpc>
-                <a:spcPts val="3240"/>
-              </a:lnSpc>
-              <a:buNone/>
-            </a:pPr>
+              <a:t>Q1: Average TV Advertising Spend</a:t>
+            </a:r>
             <a:endParaRPr lang="en-US" sz="2700" dirty="0"/>
           </a:p>
         </p:txBody>
@@ -2299,8 +2148,8 @@
         </p:nvSpPr>
         <p:spPr>
           <a:xfrm>
-            <a:off x="412955" y="2030463"/>
-            <a:ext cx="4119716" cy="348943"/>
+            <a:off x="412955" y="1734039"/>
+            <a:ext cx="4119716" cy="800844"/>
           </a:xfrm>
           <a:prstGeom prst="rect">
             <a:avLst/>
@@ -2312,60 +2161,146 @@
           <a:bodyPr wrap="square" lIns="0" tIns="0" rIns="0" bIns="0" rtlCol="0" anchor="t"/>
           <a:lstStyle/>
           <a:p>
-            <a:pPr>
+            <a:pPr marL="0" indent="0">
               <a:lnSpc>
                 <a:spcPts val="1215"/>
               </a:lnSpc>
-            </a:pPr>
-            <a:r>
-              <a:rPr lang="en-US" sz="1400" dirty="0">
-                <a:solidFill>
-                  <a:schemeClr val="bg1"/>
-                </a:solidFill>
-                <a:latin typeface="Arial Rounded MT Bold" panose="020F0704030504030204" pitchFamily="34" charset="0"/>
-              </a:rPr>
-              <a:t>Most </a:t>
-            </a:r>
-            <a:r>
-              <a:rPr lang="en-US" sz="1400" dirty="0" smtClean="0">
-                <a:solidFill>
-                  <a:schemeClr val="bg1"/>
-                </a:solidFill>
-                <a:latin typeface="Arial Rounded MT Bold" panose="020F0704030504030204" pitchFamily="34" charset="0"/>
-              </a:rPr>
-              <a:t>Frequently </a:t>
-            </a:r>
-            <a:r>
-              <a:rPr lang="en-US" sz="1400" dirty="0" err="1">
-                <a:solidFill>
-                  <a:schemeClr val="bg1"/>
-                </a:solidFill>
-                <a:latin typeface="Arial Rounded MT Bold" panose="020F0704030504030204" pitchFamily="34" charset="0"/>
-              </a:rPr>
-              <a:t>Occuring</a:t>
-            </a:r>
-            <a:r>
-              <a:rPr lang="en-US" sz="1400" dirty="0">
-                <a:solidFill>
-                  <a:schemeClr val="bg1"/>
-                </a:solidFill>
-                <a:latin typeface="Arial Rounded MT Bold" panose="020F0704030504030204" pitchFamily="34" charset="0"/>
-              </a:rPr>
-              <a:t> Wine Quality is: </a:t>
-            </a:r>
-            <a:r>
-              <a:rPr lang="en-US" sz="1400" dirty="0" smtClean="0">
-                <a:solidFill>
-                  <a:schemeClr val="bg1"/>
-                </a:solidFill>
-                <a:latin typeface="Arial Rounded MT Bold" panose="020F0704030504030204" pitchFamily="34" charset="0"/>
-              </a:rPr>
-              <a:t>5</a:t>
-            </a:r>
-            <a:endParaRPr lang="en-US" sz="1400" dirty="0">
+              <a:buNone/>
+            </a:pPr>
+            <a:r>
+              <a:rPr lang="en-US" sz="1600" dirty="0">
+                <a:solidFill>
+                  <a:srgbClr val="CBD5E1"/>
+                </a:solidFill>
+                <a:latin typeface="Arial Rounded MT Bold" panose="020F0704030504030204" pitchFamily="34" charset="0"/>
+                <a:ea typeface="Arial" pitchFamily="34" charset="-122"/>
+                <a:cs typeface="Arial" pitchFamily="34" charset="-120"/>
+              </a:rPr>
+              <a:t>The average amount spent on TV </a:t>
+            </a:r>
+            <a:endParaRPr lang="en-US" sz="1600" dirty="0" smtClean="0">
               <a:solidFill>
-                <a:schemeClr val="bg1"/>
+                <a:srgbClr val="CBD5E1"/>
               </a:solidFill>
+              <a:latin typeface="Arial Rounded MT Bold" panose="020F0704030504030204" pitchFamily="34" charset="0"/>
+              <a:ea typeface="Arial" pitchFamily="34" charset="-122"/>
+              <a:cs typeface="Arial" pitchFamily="34" charset="-120"/>
+            </a:endParaRPr>
+          </a:p>
+          <a:p>
+            <a:pPr marL="0" indent="0">
+              <a:lnSpc>
+                <a:spcPts val="1215"/>
+              </a:lnSpc>
+              <a:buNone/>
+            </a:pPr>
+            <a:endParaRPr lang="en-US" sz="1600" dirty="0">
+              <a:solidFill>
+                <a:srgbClr val="CBD5E1"/>
+              </a:solidFill>
+              <a:latin typeface="Arial Rounded MT Bold" panose="020F0704030504030204" pitchFamily="34" charset="0"/>
+              <a:ea typeface="Arial" pitchFamily="34" charset="-122"/>
+              <a:cs typeface="Arial" pitchFamily="34" charset="-120"/>
+            </a:endParaRPr>
+          </a:p>
+          <a:p>
+            <a:pPr marL="0" indent="0">
+              <a:lnSpc>
+                <a:spcPts val="1215"/>
+              </a:lnSpc>
+              <a:buNone/>
+            </a:pPr>
+            <a:r>
+              <a:rPr lang="en-US" sz="1600" dirty="0" smtClean="0">
+                <a:solidFill>
+                  <a:srgbClr val="CBD5E1"/>
+                </a:solidFill>
+                <a:latin typeface="Arial Rounded MT Bold" panose="020F0704030504030204" pitchFamily="34" charset="0"/>
+                <a:ea typeface="Arial" pitchFamily="34" charset="-122"/>
+                <a:cs typeface="Arial" pitchFamily="34" charset="-120"/>
+              </a:rPr>
+              <a:t>advertising </a:t>
+            </a:r>
+            <a:r>
+              <a:rPr lang="en-US" sz="1600" dirty="0">
+                <a:solidFill>
+                  <a:srgbClr val="CBD5E1"/>
+                </a:solidFill>
+                <a:latin typeface="Arial Rounded MT Bold" panose="020F0704030504030204" pitchFamily="34" charset="0"/>
+                <a:ea typeface="Arial" pitchFamily="34" charset="-122"/>
+                <a:cs typeface="Arial" pitchFamily="34" charset="-120"/>
+              </a:rPr>
+              <a:t>in the dataset is </a:t>
+            </a:r>
+            <a:r>
+              <a:rPr lang="en-US" sz="1600" b="1" dirty="0">
+                <a:solidFill>
+                  <a:srgbClr val="38BDF8"/>
+                </a:solidFill>
+                <a:latin typeface="Arial Rounded MT Bold" panose="020F0704030504030204" pitchFamily="34" charset="0"/>
+                <a:ea typeface="Arial" pitchFamily="34" charset="-122"/>
+                <a:cs typeface="Arial" pitchFamily="34" charset="-120"/>
+              </a:rPr>
+              <a:t>$</a:t>
+            </a:r>
+            <a:r>
+              <a:rPr lang="en-US" sz="1600" b="1" dirty="0" smtClean="0">
+                <a:solidFill>
+                  <a:srgbClr val="38BDF8"/>
+                </a:solidFill>
+                <a:latin typeface="Arial Rounded MT Bold" panose="020F0704030504030204" pitchFamily="34" charset="0"/>
+                <a:ea typeface="Arial" pitchFamily="34" charset="-122"/>
+                <a:cs typeface="Arial" pitchFamily="34" charset="-120"/>
+              </a:rPr>
+              <a:t>147.04</a:t>
+            </a:r>
+          </a:p>
+          <a:p>
+            <a:pPr marL="0" indent="0">
+              <a:lnSpc>
+                <a:spcPts val="1215"/>
+              </a:lnSpc>
+              <a:buNone/>
+            </a:pPr>
+            <a:endParaRPr lang="en-US" sz="1600" b="1" dirty="0">
+              <a:solidFill>
+                <a:srgbClr val="38BDF8"/>
+              </a:solidFill>
+              <a:latin typeface="Arial Rounded MT Bold" panose="020F0704030504030204" pitchFamily="34" charset="0"/>
+              <a:ea typeface="Arial" pitchFamily="34" charset="-122"/>
+              <a:cs typeface="Arial" pitchFamily="34" charset="-120"/>
+            </a:endParaRPr>
+          </a:p>
+          <a:p>
+            <a:pPr marL="0" indent="0">
+              <a:lnSpc>
+                <a:spcPts val="1215"/>
+              </a:lnSpc>
+              <a:buNone/>
+            </a:pPr>
+            <a:r>
+              <a:rPr lang="en-US" sz="1600" dirty="0" smtClean="0">
+                <a:solidFill>
+                  <a:srgbClr val="CBD5E1"/>
+                </a:solidFill>
+                <a:latin typeface="Arial Rounded MT Bold" panose="020F0704030504030204" pitchFamily="34" charset="0"/>
+                <a:ea typeface="Arial" pitchFamily="34" charset="-122"/>
+                <a:cs typeface="Arial" pitchFamily="34" charset="-120"/>
+              </a:rPr>
+              <a:t>(</a:t>
+            </a:r>
+            <a:r>
+              <a:rPr lang="en-US" sz="1600" dirty="0">
+                <a:solidFill>
+                  <a:srgbClr val="CBD5E1"/>
+                </a:solidFill>
+                <a:latin typeface="Arial Rounded MT Bold" panose="020F0704030504030204" pitchFamily="34" charset="0"/>
+                <a:ea typeface="Arial" pitchFamily="34" charset="-122"/>
+                <a:cs typeface="Arial" pitchFamily="34" charset="-120"/>
+              </a:rPr>
+              <a:t>in thousands).</a:t>
+            </a:r>
+            <a:endParaRPr lang="en-US" sz="1600" dirty="0">
               <a:latin typeface="Arial Rounded MT Bold" panose="020F0704030504030204" pitchFamily="34" charset="0"/>
             </a:endParaRPr>
           </a:p>
@@ -2379,8 +2314,8 @@
         </p:nvSpPr>
         <p:spPr>
           <a:xfrm>
-            <a:off x="4984954" y="2003861"/>
-            <a:ext cx="3087329" cy="305892"/>
+            <a:off x="412955" y="3195484"/>
+            <a:ext cx="4326783" cy="1075672"/>
           </a:xfrm>
           <a:prstGeom prst="rect">
             <a:avLst/>
@@ -2392,410 +2327,189 @@
           <a:bodyPr wrap="square" lIns="0" tIns="0" rIns="0" bIns="0" rtlCol="0" anchor="t"/>
           <a:lstStyle/>
           <a:p>
-            <a:pPr>
-              <a:lnSpc>
-                <a:spcPts val="1215"/>
-              </a:lnSpc>
+            <a:pPr marL="0" indent="0">
+              <a:lnSpc>
+                <a:spcPts val="1080"/>
+              </a:lnSpc>
+              <a:buNone/>
             </a:pPr>
             <a:r>
               <a:rPr lang="en-US" sz="1600" dirty="0">
                 <a:solidFill>
-                  <a:schemeClr val="bg1"/>
-                </a:solidFill>
-                <a:latin typeface="Arial Rounded MT Bold" panose="020F0704030504030204" pitchFamily="34" charset="0"/>
-              </a:rPr>
-              <a:t>Minimum Wine Quality is: </a:t>
-            </a:r>
-            <a:r>
-              <a:rPr lang="en-US" sz="1600" dirty="0" smtClean="0">
-                <a:solidFill>
-                  <a:schemeClr val="bg1"/>
-                </a:solidFill>
-                <a:latin typeface="Arial Rounded MT Bold" panose="020F0704030504030204" pitchFamily="34" charset="0"/>
-              </a:rPr>
-              <a:t>3</a:t>
-            </a:r>
+                  <a:srgbClr val="CBD5E1"/>
+                </a:solidFill>
+                <a:latin typeface="Arial Rounded MT Bold" panose="020F0704030504030204" pitchFamily="34" charset="0"/>
+                <a:ea typeface="Arial" pitchFamily="34" charset="-122"/>
+                <a:cs typeface="Arial" pitchFamily="34" charset="-120"/>
+              </a:rPr>
+              <a:t>TV advertising shows the highest average </a:t>
+            </a:r>
+            <a:endParaRPr lang="en-US" sz="1600" dirty="0" smtClean="0">
+              <a:solidFill>
+                <a:srgbClr val="CBD5E1"/>
+              </a:solidFill>
+              <a:latin typeface="Arial Rounded MT Bold" panose="020F0704030504030204" pitchFamily="34" charset="0"/>
+              <a:ea typeface="Arial" pitchFamily="34" charset="-122"/>
+              <a:cs typeface="Arial" pitchFamily="34" charset="-120"/>
+            </a:endParaRPr>
+          </a:p>
+          <a:p>
+            <a:pPr marL="0" indent="0">
+              <a:lnSpc>
+                <a:spcPts val="1080"/>
+              </a:lnSpc>
+              <a:buNone/>
+            </a:pPr>
             <a:endParaRPr lang="en-US" sz="1600" dirty="0">
               <a:solidFill>
-                <a:schemeClr val="bg1"/>
+                <a:srgbClr val="CBD5E1"/>
               </a:solidFill>
               <a:latin typeface="Arial Rounded MT Bold" panose="020F0704030504030204" pitchFamily="34" charset="0"/>
+              <a:ea typeface="Arial" pitchFamily="34" charset="-122"/>
+              <a:cs typeface="Arial" pitchFamily="34" charset="-120"/>
             </a:endParaRPr>
           </a:p>
-        </p:txBody>
-      </p:sp>
-      <p:sp>
-        <p:nvSpPr>
-          <p:cNvPr id="8" name="Text 0"/>
-          <p:cNvSpPr/>
-          <p:nvPr/>
-        </p:nvSpPr>
-        <p:spPr>
-          <a:xfrm>
-            <a:off x="2566516" y="2701133"/>
-            <a:ext cx="4089925" cy="392695"/>
-          </a:xfrm>
-          <a:prstGeom prst="rect">
-            <a:avLst/>
-          </a:prstGeom>
-          <a:solidFill>
-            <a:srgbClr val="1E293B"/>
-          </a:solidFill>
-          <a:ln>
-            <a:noFill/>
-          </a:ln>
-          <a:effectLst>
-            <a:outerShdw blurRad="190500" dist="228600" dir="2700000" algn="ctr">
-              <a:srgbClr val="000000">
-                <a:alpha val="30000"/>
-              </a:srgbClr>
-            </a:outerShdw>
-          </a:effectLst>
-          <a:scene3d>
-            <a:camera prst="orthographicFront">
-              <a:rot lat="0" lon="0" rev="0"/>
-            </a:camera>
-            <a:lightRig rig="glow" dir="t">
-              <a:rot lat="0" lon="0" rev="4800000"/>
-            </a:lightRig>
-          </a:scene3d>
-          <a:sp3d prstMaterial="matte">
-            <a:bevelT w="127000" h="63500"/>
-          </a:sp3d>
-        </p:spPr>
-        <p:txBody>
-          <a:bodyPr wrap="none" lIns="0" tIns="0" rIns="0" bIns="0" rtlCol="0" anchor="ctr">
-            <a:normAutofit/>
-          </a:bodyPr>
-          <a:lstStyle/>
           <a:p>
             <a:pPr marL="0" indent="0">
+              <a:lnSpc>
+                <a:spcPts val="1080"/>
+              </a:lnSpc>
               <a:buNone/>
             </a:pPr>
-            <a:endParaRPr lang="en-US" dirty="0"/>
-          </a:p>
-        </p:txBody>
-      </p:sp>
-      <p:sp>
-        <p:nvSpPr>
-          <p:cNvPr id="10" name="Text 3"/>
-          <p:cNvSpPr/>
-          <p:nvPr/>
-        </p:nvSpPr>
-        <p:spPr>
-          <a:xfrm>
-            <a:off x="412955" y="3327982"/>
-            <a:ext cx="2605548" cy="241788"/>
-          </a:xfrm>
-          <a:prstGeom prst="rect">
-            <a:avLst/>
-          </a:prstGeom>
-          <a:noFill/>
-          <a:ln/>
-        </p:spPr>
-        <p:txBody>
-          <a:bodyPr wrap="square" lIns="0" tIns="0" rIns="0" bIns="0" rtlCol="0" anchor="t"/>
-          <a:lstStyle/>
-          <a:p>
-            <a:pPr>
-              <a:lnSpc>
-                <a:spcPts val="1215"/>
-              </a:lnSpc>
-            </a:pPr>
+            <a:r>
+              <a:rPr lang="en-US" sz="1600" dirty="0" smtClean="0">
+                <a:solidFill>
+                  <a:srgbClr val="CBD5E1"/>
+                </a:solidFill>
+                <a:latin typeface="Arial Rounded MT Bold" panose="020F0704030504030204" pitchFamily="34" charset="0"/>
+                <a:ea typeface="Arial" pitchFamily="34" charset="-122"/>
+                <a:cs typeface="Arial" pitchFamily="34" charset="-120"/>
+              </a:rPr>
+              <a:t>spend </a:t>
+            </a:r>
+            <a:r>
+              <a:rPr lang="en-US" sz="1600" dirty="0">
+                <a:solidFill>
+                  <a:srgbClr val="CBD5E1"/>
+                </a:solidFill>
+                <a:latin typeface="Arial Rounded MT Bold" panose="020F0704030504030204" pitchFamily="34" charset="0"/>
+                <a:ea typeface="Arial" pitchFamily="34" charset="-122"/>
+                <a:cs typeface="Arial" pitchFamily="34" charset="-120"/>
+              </a:rPr>
+              <a:t>among all three advertising </a:t>
+            </a:r>
+          </a:p>
+          <a:p>
+            <a:pPr marL="0" indent="0">
+              <a:lnSpc>
+                <a:spcPts val="1080"/>
+              </a:lnSpc>
+              <a:buNone/>
+            </a:pPr>
+            <a:endParaRPr lang="en-US" sz="1600" dirty="0" smtClean="0">
+              <a:solidFill>
+                <a:srgbClr val="CBD5E1"/>
+              </a:solidFill>
+              <a:latin typeface="Arial Rounded MT Bold" panose="020F0704030504030204" pitchFamily="34" charset="0"/>
+              <a:ea typeface="Arial" pitchFamily="34" charset="-122"/>
+              <a:cs typeface="Arial" pitchFamily="34" charset="-120"/>
+            </a:endParaRPr>
+          </a:p>
+          <a:p>
+            <a:pPr marL="0" indent="0">
+              <a:lnSpc>
+                <a:spcPts val="1080"/>
+              </a:lnSpc>
+              <a:buNone/>
+            </a:pPr>
+            <a:r>
+              <a:rPr lang="en-US" sz="1600" dirty="0" smtClean="0">
+                <a:solidFill>
+                  <a:srgbClr val="CBD5E1"/>
+                </a:solidFill>
+                <a:latin typeface="Arial Rounded MT Bold" panose="020F0704030504030204" pitchFamily="34" charset="0"/>
+                <a:ea typeface="Arial" pitchFamily="34" charset="-122"/>
+                <a:cs typeface="Arial" pitchFamily="34" charset="-120"/>
+              </a:rPr>
+              <a:t>mediums</a:t>
+            </a:r>
+            <a:r>
+              <a:rPr lang="en-US" sz="1600" dirty="0">
+                <a:solidFill>
+                  <a:srgbClr val="CBD5E1"/>
+                </a:solidFill>
+                <a:latin typeface="Arial Rounded MT Bold" panose="020F0704030504030204" pitchFamily="34" charset="0"/>
+                <a:ea typeface="Arial" pitchFamily="34" charset="-122"/>
+                <a:cs typeface="Arial" pitchFamily="34" charset="-120"/>
+              </a:rPr>
+              <a:t>, indicating its importance in </a:t>
+            </a:r>
+            <a:r>
+              <a:rPr lang="en-US" sz="1600" dirty="0" smtClean="0">
+                <a:solidFill>
+                  <a:srgbClr val="CBD5E1"/>
+                </a:solidFill>
+                <a:latin typeface="Arial Rounded MT Bold" panose="020F0704030504030204" pitchFamily="34" charset="0"/>
+                <a:ea typeface="Arial" pitchFamily="34" charset="-122"/>
+                <a:cs typeface="Arial" pitchFamily="34" charset="-120"/>
+              </a:rPr>
+              <a:t>the</a:t>
+            </a:r>
+          </a:p>
+          <a:p>
+            <a:pPr marL="0" indent="0">
+              <a:lnSpc>
+                <a:spcPts val="1080"/>
+              </a:lnSpc>
+              <a:buNone/>
+            </a:pPr>
+            <a:endParaRPr lang="en-US" sz="1600" dirty="0">
+              <a:solidFill>
+                <a:srgbClr val="CBD5E1"/>
+              </a:solidFill>
+              <a:latin typeface="Arial Rounded MT Bold" panose="020F0704030504030204" pitchFamily="34" charset="0"/>
+              <a:ea typeface="Arial" pitchFamily="34" charset="-122"/>
+              <a:cs typeface="Arial" pitchFamily="34" charset="-120"/>
+            </a:endParaRPr>
+          </a:p>
+          <a:p>
+            <a:pPr marL="0" indent="0">
+              <a:lnSpc>
+                <a:spcPts val="1080"/>
+              </a:lnSpc>
+              <a:buNone/>
+            </a:pPr>
+            <a:r>
+              <a:rPr lang="en-US" sz="1600" dirty="0" smtClean="0">
+                <a:solidFill>
+                  <a:srgbClr val="CBD5E1"/>
+                </a:solidFill>
+                <a:latin typeface="Arial Rounded MT Bold" panose="020F0704030504030204" pitchFamily="34" charset="0"/>
+                <a:ea typeface="Arial" pitchFamily="34" charset="-122"/>
+                <a:cs typeface="Arial" pitchFamily="34" charset="-120"/>
+              </a:rPr>
+              <a:t>marketing </a:t>
+            </a:r>
+            <a:r>
+              <a:rPr lang="en-US" sz="1600" dirty="0">
+                <a:solidFill>
+                  <a:srgbClr val="CBD5E1"/>
+                </a:solidFill>
+                <a:latin typeface="Arial Rounded MT Bold" panose="020F0704030504030204" pitchFamily="34" charset="0"/>
+                <a:ea typeface="Arial" pitchFamily="34" charset="-122"/>
+                <a:cs typeface="Arial" pitchFamily="34" charset="-120"/>
+              </a:rPr>
+              <a:t>mix.</a:t>
+            </a:r>
             <a:endParaRPr lang="en-US" sz="1600" dirty="0">
               <a:latin typeface="Arial Rounded MT Bold" panose="020F0704030504030204" pitchFamily="34" charset="0"/>
             </a:endParaRPr>
           </a:p>
         </p:txBody>
       </p:sp>
-      <p:sp>
-        <p:nvSpPr>
-          <p:cNvPr id="31" name="Rectangle 7"/>
-          <p:cNvSpPr>
-            <a:spLocks noChangeArrowheads="1"/>
-          </p:cNvSpPr>
-          <p:nvPr/>
-        </p:nvSpPr>
-        <p:spPr bwMode="auto">
-          <a:xfrm>
-            <a:off x="2674374" y="2740806"/>
-            <a:ext cx="3706762" cy="556873"/>
-          </a:xfrm>
-          <a:prstGeom prst="rect">
-            <a:avLst/>
-          </a:prstGeom>
-          <a:noFill/>
-          <a:ln>
-            <a:noFill/>
-          </a:ln>
-          <a:effectLst/>
-          <a:extLst>
-            <a:ext uri="{909E8E84-426E-40DD-AFC4-6F175D3DCCD1}">
-              <a14:hiddenFill xmlns:a14="http://schemas.microsoft.com/office/drawing/2010/main">
-                <a:solidFill>
-                  <a:schemeClr val="accent1"/>
-                </a:solidFill>
-              </a14:hiddenFill>
-            </a:ext>
-            <a:ext uri="{91240B29-F687-4F45-9708-019B960494DF}">
-              <a14:hiddenLine xmlns:a14="http://schemas.microsoft.com/office/drawing/2010/main" w="9525">
-                <a:solidFill>
-                  <a:schemeClr val="tx1"/>
-                </a:solidFill>
-                <a:miter lim="800000"/>
-                <a:headEnd/>
-                <a:tailEnd/>
-              </a14:hiddenLine>
-            </a:ext>
-            <a:ext uri="{AF507438-7753-43E0-B8FC-AC1667EBCBE1}">
-              <a14:hiddenEffects xmlns:a14="http://schemas.microsoft.com/office/drawing/2010/main">
-                <a:effectLst>
-                  <a:outerShdw dist="35921" dir="2700000" algn="ctr" rotWithShape="0">
-                    <a:schemeClr val="bg2"/>
-                  </a:outerShdw>
-                </a:effectLst>
-              </a14:hiddenEffects>
-            </a:ext>
-          </a:extLst>
-        </p:spPr>
-        <p:txBody>
-          <a:bodyPr vert="horz" wrap="square" lIns="91440" tIns="33327" rIns="91440" bIns="0" numCol="1" anchor="ctr" anchorCtr="0" compatLnSpc="1">
-            <a:prstTxWarp prst="textNoShape">
-              <a:avLst/>
-            </a:prstTxWarp>
-            <a:spAutoFit/>
-          </a:bodyPr>
-          <a:lstStyle/>
-          <a:p>
-            <a:pPr marL="0" marR="0" lvl="0" indent="0" algn="l" defTabSz="914400" rtl="0" eaLnBrk="0" fontAlgn="base" latinLnBrk="0" hangingPunct="0">
-              <a:lnSpc>
-                <a:spcPct val="100000"/>
-              </a:lnSpc>
-              <a:spcBef>
-                <a:spcPct val="0"/>
-              </a:spcBef>
-              <a:spcAft>
-                <a:spcPct val="0"/>
-              </a:spcAft>
-              <a:buClrTx/>
-              <a:buSzTx/>
-              <a:buFontTx/>
-              <a:buNone/>
-              <a:tabLst/>
-            </a:pPr>
-            <a:r>
-              <a:rPr kumimoji="0" lang="en-US" altLang="en-US" sz="1600" b="0" i="0" u="none" strike="noStrike" cap="none" normalizeH="0" baseline="0" dirty="0" smtClean="0">
-                <a:ln>
-                  <a:noFill/>
-                </a:ln>
-                <a:solidFill>
-                  <a:srgbClr val="E3E3E3"/>
-                </a:solidFill>
-                <a:effectLst/>
-                <a:latin typeface="Arial Rounded MT Bold" panose="020F0704030504030204" pitchFamily="34" charset="0"/>
-                <a:cs typeface="Courier New" panose="02070309020205020404" pitchFamily="49" charset="0"/>
-              </a:rPr>
-              <a:t>Maximum Wine Quality is: 8 </a:t>
-            </a:r>
-          </a:p>
-          <a:p>
-            <a:pPr marL="0" marR="0" lvl="0" indent="0" algn="l" defTabSz="914400" rtl="0" eaLnBrk="0" fontAlgn="base" latinLnBrk="0" hangingPunct="0">
-              <a:lnSpc>
-                <a:spcPct val="100000"/>
-              </a:lnSpc>
-              <a:spcBef>
-                <a:spcPct val="0"/>
-              </a:spcBef>
-              <a:spcAft>
-                <a:spcPct val="0"/>
-              </a:spcAft>
-              <a:buClrTx/>
-              <a:buSzTx/>
-              <a:buFontTx/>
-              <a:buNone/>
-              <a:tabLst/>
-            </a:pPr>
-            <a:endParaRPr kumimoji="0" lang="en-US" altLang="en-US" sz="1800" b="0" i="0" u="none" strike="noStrike" cap="none" normalizeH="0" baseline="0" dirty="0" smtClean="0">
-              <a:ln>
-                <a:noFill/>
-              </a:ln>
-              <a:solidFill>
-                <a:schemeClr val="tx1"/>
-              </a:solidFill>
-              <a:effectLst/>
-              <a:latin typeface="Arial" panose="020B0604020202020204" pitchFamily="34" charset="0"/>
-            </a:endParaRPr>
-          </a:p>
-        </p:txBody>
-      </p:sp>
-      <p:sp>
-        <p:nvSpPr>
-          <p:cNvPr id="32" name="Rectangle 8"/>
-          <p:cNvSpPr>
-            <a:spLocks noChangeArrowheads="1"/>
-          </p:cNvSpPr>
-          <p:nvPr/>
-        </p:nvSpPr>
-        <p:spPr bwMode="auto">
-          <a:xfrm>
-            <a:off x="0" y="457200"/>
-            <a:ext cx="8139113" cy="15875"/>
-          </a:xfrm>
-          <a:prstGeom prst="rect">
-            <a:avLst/>
-          </a:prstGeom>
-          <a:solidFill>
-            <a:srgbClr val="000000"/>
-          </a:solidFill>
-          <a:ln w="9525">
-            <a:solidFill>
-              <a:schemeClr val="tx1"/>
-            </a:solidFill>
-            <a:prstDash val="solid"/>
-            <a:miter lim="800000"/>
-            <a:headEnd/>
-            <a:tailEnd/>
-          </a:ln>
-          <a:effectLst/>
-          <a:extLst>
-            <a:ext uri="{AF507438-7753-43E0-B8FC-AC1667EBCBE1}">
-              <a14:hiddenEffects xmlns:a14="http://schemas.microsoft.com/office/drawing/2010/main">
-                <a:effectLst>
-                  <a:outerShdw dist="35921" dir="2700000" algn="ctr" rotWithShape="0">
-                    <a:schemeClr val="bg2"/>
-                  </a:outerShdw>
-                </a:effectLst>
-              </a14:hiddenEffects>
-            </a:ext>
-          </a:extLst>
-        </p:spPr>
-        <p:txBody>
-          <a:bodyPr vert="horz" wrap="none" lIns="91440" tIns="45720" rIns="91440" bIns="45720" numCol="1" anchor="ctr" anchorCtr="0" compatLnSpc="1">
-            <a:prstTxWarp prst="textNoShape">
-              <a:avLst/>
-            </a:prstTxWarp>
-            <a:spAutoFit/>
-          </a:bodyPr>
-          <a:lstStyle/>
-          <a:p>
-            <a:endParaRPr lang="en-IN"/>
-          </a:p>
-        </p:txBody>
-      </p:sp>
-      <p:sp>
-        <p:nvSpPr>
-          <p:cNvPr id="33" name="Rectangle 9"/>
-          <p:cNvSpPr>
-            <a:spLocks noChangeArrowheads="1"/>
-          </p:cNvSpPr>
-          <p:nvPr/>
-        </p:nvSpPr>
-        <p:spPr bwMode="auto">
-          <a:xfrm>
-            <a:off x="0" y="457200"/>
-            <a:ext cx="9144000" cy="0"/>
-          </a:xfrm>
-          <a:prstGeom prst="rect">
-            <a:avLst/>
-          </a:prstGeom>
-          <a:noFill/>
-          <a:ln>
-            <a:noFill/>
-          </a:ln>
-          <a:effectLst/>
-          <a:extLst>
-            <a:ext uri="{909E8E84-426E-40DD-AFC4-6F175D3DCCD1}">
-              <a14:hiddenFill xmlns:a14="http://schemas.microsoft.com/office/drawing/2010/main">
-                <a:solidFill>
-                  <a:schemeClr val="accent1"/>
-                </a:solidFill>
-              </a14:hiddenFill>
-            </a:ext>
-            <a:ext uri="{91240B29-F687-4F45-9708-019B960494DF}">
-              <a14:hiddenLine xmlns:a14="http://schemas.microsoft.com/office/drawing/2010/main" w="9525">
-                <a:solidFill>
-                  <a:schemeClr val="tx1"/>
-                </a:solidFill>
-                <a:miter lim="800000"/>
-                <a:headEnd/>
-                <a:tailEnd/>
-              </a14:hiddenLine>
-            </a:ext>
-            <a:ext uri="{AF507438-7753-43E0-B8FC-AC1667EBCBE1}">
-              <a14:hiddenEffects xmlns:a14="http://schemas.microsoft.com/office/drawing/2010/main">
-                <a:effectLst>
-                  <a:outerShdw dist="35921" dir="2700000" algn="ctr" rotWithShape="0">
-                    <a:schemeClr val="bg2"/>
-                  </a:outerShdw>
-                </a:effectLst>
-              </a14:hiddenEffects>
-            </a:ext>
-          </a:extLst>
-        </p:spPr>
-        <p:txBody>
-          <a:bodyPr vert="horz" wrap="none" lIns="91440" tIns="45720" rIns="91440" bIns="45720" numCol="1" anchor="ctr" anchorCtr="0" compatLnSpc="1">
-            <a:prstTxWarp prst="textNoShape">
-              <a:avLst/>
-            </a:prstTxWarp>
-            <a:spAutoFit/>
-          </a:bodyPr>
-          <a:lstStyle/>
-          <a:p>
-            <a:pPr marL="0" marR="0" lvl="0" indent="0" algn="l" defTabSz="914400" rtl="0" eaLnBrk="0" fontAlgn="base" latinLnBrk="0" hangingPunct="0">
-              <a:lnSpc>
-                <a:spcPct val="100000"/>
-              </a:lnSpc>
-              <a:spcBef>
-                <a:spcPct val="0"/>
-              </a:spcBef>
-              <a:spcAft>
-                <a:spcPct val="0"/>
-              </a:spcAft>
-              <a:buClrTx/>
-              <a:buSzTx/>
-              <a:buFontTx/>
-              <a:buNone/>
-              <a:tabLst/>
-            </a:pPr>
-            <a:r>
-              <a:rPr kumimoji="0" lang="en-US" altLang="en-US" sz="800" b="0" i="0" u="none" strike="noStrike" cap="none" normalizeH="0" baseline="0" smtClean="0">
-                <a:ln>
-                  <a:noFill/>
-                </a:ln>
-                <a:solidFill>
-                  <a:schemeClr val="tx1"/>
-                </a:solidFill>
-                <a:effectLst/>
-              </a:rPr>
-              <a:t/>
-            </a:r>
-            <a:br>
-              <a:rPr kumimoji="0" lang="en-US" altLang="en-US" sz="800" b="0" i="0" u="none" strike="noStrike" cap="none" normalizeH="0" baseline="0" smtClean="0">
-                <a:ln>
-                  <a:noFill/>
-                </a:ln>
-                <a:solidFill>
-                  <a:schemeClr val="tx1"/>
-                </a:solidFill>
-                <a:effectLst/>
-              </a:rPr>
-            </a:br>
-            <a:endParaRPr kumimoji="0" lang="en-US" altLang="en-US" sz="1800" b="0" i="0" u="none" strike="noStrike" cap="none" normalizeH="0" baseline="0" smtClean="0">
-              <a:ln>
-                <a:noFill/>
-              </a:ln>
-              <a:solidFill>
-                <a:schemeClr val="tx1"/>
-              </a:solidFill>
-              <a:effectLst/>
-              <a:latin typeface="Arial" panose="020B0604020202020204" pitchFamily="34" charset="0"/>
-            </a:endParaRPr>
-          </a:p>
-        </p:txBody>
-      </p:sp>
       <p:pic>
         <p:nvPicPr>
-          <p:cNvPr id="34" name="Picture 33"/>
+          <p:cNvPr id="6" name="Picture 5"/>
           <p:cNvPicPr>
             <a:picLocks noChangeAspect="1"/>
           </p:cNvPicPr>
@@ -2809,34 +2523,12 @@
         </p:blipFill>
         <p:spPr>
           <a:xfrm>
-            <a:off x="1098910" y="3501133"/>
-            <a:ext cx="6592220" cy="1457528"/>
+            <a:off x="5099936" y="1571260"/>
+            <a:ext cx="3592960" cy="2838369"/>
           </a:xfrm>
           <a:prstGeom prst="rect">
             <a:avLst/>
           </a:prstGeom>
-          <a:ln>
-            <a:noFill/>
-          </a:ln>
-          <a:effectLst>
-            <a:outerShdw blurRad="107950" dist="12700" dir="5400000" algn="ctr">
-              <a:srgbClr val="000000"/>
-            </a:outerShdw>
-          </a:effectLst>
-          <a:scene3d>
-            <a:camera prst="orthographicFront">
-              <a:rot lat="0" lon="0" rev="0"/>
-            </a:camera>
-            <a:lightRig rig="soft" dir="t">
-              <a:rot lat="0" lon="0" rev="0"/>
-            </a:lightRig>
-          </a:scene3d>
-          <a:sp3d contourW="44450" prstMaterial="matte">
-            <a:bevelT w="63500" h="63500" prst="artDeco"/>
-            <a:contourClr>
-              <a:srgbClr val="FFFFFF"/>
-            </a:contourClr>
-          </a:sp3d>
         </p:spPr>
       </p:pic>
     </p:spTree>
@@ -2893,6 +2585,12 @@
           <a:bodyPr wrap="square" lIns="0" tIns="0" rIns="0" bIns="0" rtlCol="0" anchor="t"/>
           <a:lstStyle/>
           <a:p>
+            <a:pPr marL="0" indent="0">
+              <a:lnSpc>
+                <a:spcPts val="3240"/>
+              </a:lnSpc>
+              <a:buNone/>
+            </a:pPr>
             <a:r>
               <a:rPr lang="en-US" sz="2700" b="1" dirty="0">
                 <a:solidFill>
@@ -2902,32 +2600,9 @@
                 <a:ea typeface="Arial" pitchFamily="34" charset="-122"/>
                 <a:cs typeface="Arial" pitchFamily="34" charset="-120"/>
               </a:rPr>
-              <a:t>Q2: </a:t>
-            </a:r>
-            <a:r>
-              <a:rPr lang="en-US" sz="2800" dirty="0">
-                <a:solidFill>
-                  <a:schemeClr val="bg1"/>
-                </a:solidFill>
-              </a:rPr>
-              <a:t>Finding how 'fixed acidity', 'alcohol content' and 'free </a:t>
-            </a:r>
-            <a:r>
-              <a:rPr lang="en-US" sz="2800" dirty="0" err="1">
-                <a:solidFill>
-                  <a:schemeClr val="bg1"/>
-                </a:solidFill>
-              </a:rPr>
-              <a:t>sulphur</a:t>
-            </a:r>
-            <a:r>
-              <a:rPr lang="en-US" sz="2800" dirty="0">
-                <a:solidFill>
-                  <a:schemeClr val="bg1"/>
-                </a:solidFill>
-              </a:rPr>
-              <a:t> dioxide' is co-related to quality of the wine</a:t>
-            </a:r>
+              <a:t>Q2: Advertising vs Sales Correlation</a:t>
+            </a:r>
+            <a:endParaRPr lang="en-US" sz="2700" dirty="0"/>
           </a:p>
         </p:txBody>
       </p:sp>
@@ -2960,7 +2635,7 @@
               <a:buChar char="•"/>
             </a:pPr>
             <a:r>
-              <a:rPr lang="en-US" sz="1350" b="1" dirty="0" smtClean="0">
+              <a:rPr lang="en-US" sz="1350" b="1" dirty="0">
                 <a:solidFill>
                   <a:srgbClr val="38BDF8"/>
                 </a:solidFill>
@@ -2968,18 +2643,7 @@
                 <a:ea typeface="Arial" pitchFamily="34" charset="-122"/>
                 <a:cs typeface="Arial" pitchFamily="34" charset="-120"/>
               </a:rPr>
-              <a:t>Alcohol Content :</a:t>
-            </a:r>
-            <a:r>
-              <a:rPr lang="en-US" sz="1350" dirty="0" smtClean="0">
-                <a:solidFill>
-                  <a:srgbClr val="CBD5E1"/>
-                </a:solidFill>
-                <a:latin typeface="Arial Rounded MT Bold" panose="020F0704030504030204" pitchFamily="34" charset="0"/>
-                <a:ea typeface="Arial" pitchFamily="34" charset="-122"/>
-                <a:cs typeface="Arial" pitchFamily="34" charset="-120"/>
-              </a:rPr>
-              <a:t> </a:t>
+              <a:t>TV Advertising:</a:t>
             </a:r>
             <a:r>
               <a:rPr lang="en-US" sz="1350" dirty="0">
@@ -2990,196 +2654,7 @@
                 <a:ea typeface="Arial" pitchFamily="34" charset="-122"/>
                 <a:cs typeface="Arial" pitchFamily="34" charset="-120"/>
               </a:rPr>
-              <a:t>Correlation = </a:t>
-            </a:r>
-            <a:r>
-              <a:rPr lang="en-IN" sz="1400" dirty="0">
-                <a:solidFill>
-                  <a:schemeClr val="bg1"/>
-                </a:solidFill>
-                <a:latin typeface="Arial Rounded MT Bold" panose="020F0704030504030204" pitchFamily="34" charset="0"/>
-              </a:rPr>
-              <a:t>0.476166</a:t>
-            </a:r>
-            <a:r>
-              <a:rPr lang="en-US" sz="1350" dirty="0" smtClean="0">
-                <a:solidFill>
-                  <a:schemeClr val="bg1"/>
-                </a:solidFill>
-                <a:latin typeface="Arial Rounded MT Bold" panose="020F0704030504030204" pitchFamily="34" charset="0"/>
-                <a:ea typeface="Arial" pitchFamily="34" charset="-122"/>
-                <a:cs typeface="Arial" pitchFamily="34" charset="-120"/>
-              </a:rPr>
-              <a:t>     </a:t>
-            </a:r>
-            <a:r>
-              <a:rPr lang="en-US" sz="1350" dirty="0" smtClean="0">
-                <a:solidFill>
-                  <a:srgbClr val="CBD5E1"/>
-                </a:solidFill>
-                <a:latin typeface="Arial Rounded MT Bold" panose="020F0704030504030204" pitchFamily="34" charset="0"/>
-                <a:ea typeface="Arial" pitchFamily="34" charset="-122"/>
-                <a:cs typeface="Arial" pitchFamily="34" charset="-120"/>
-              </a:rPr>
-              <a:t>   </a:t>
-            </a:r>
-          </a:p>
-          <a:p>
-            <a:pPr marL="342900" indent="-342900">
-              <a:lnSpc>
-                <a:spcPts val="2430"/>
-              </a:lnSpc>
-              <a:buSzPct val="100000"/>
-              <a:buChar char="•"/>
-            </a:pPr>
-            <a:r>
-              <a:rPr lang="en-US" sz="1350" dirty="0" smtClean="0">
-                <a:solidFill>
-                  <a:srgbClr val="CBD5E1"/>
-                </a:solidFill>
-                <a:latin typeface="Arial Rounded MT Bold" panose="020F0704030504030204" pitchFamily="34" charset="0"/>
-                <a:ea typeface="Arial" pitchFamily="34" charset="-122"/>
-                <a:cs typeface="Arial" pitchFamily="34" charset="-120"/>
-              </a:rPr>
-              <a:t>(Positive</a:t>
-            </a:r>
-            <a:r>
-              <a:rPr lang="en-US" sz="1350" dirty="0" smtClean="0">
-                <a:solidFill>
-                  <a:srgbClr val="CBD5E1"/>
-                </a:solidFill>
-                <a:latin typeface="Arial Rounded MT Bold" panose="020F0704030504030204" pitchFamily="34" charset="0"/>
-                <a:ea typeface="Arial" pitchFamily="34" charset="-122"/>
-                <a:cs typeface="Arial" pitchFamily="34" charset="-120"/>
-              </a:rPr>
-              <a:t>)</a:t>
-            </a:r>
-          </a:p>
-          <a:p>
-            <a:pPr marL="342900" indent="-342900">
-              <a:lnSpc>
-                <a:spcPts val="2430"/>
-              </a:lnSpc>
-              <a:buSzPct val="100000"/>
-              <a:buChar char="•"/>
-            </a:pPr>
-            <a:endParaRPr lang="en-US" sz="1350" dirty="0">
-              <a:latin typeface="Arial Rounded MT Bold" panose="020F0704030504030204" pitchFamily="34" charset="0"/>
-            </a:endParaRPr>
-          </a:p>
-          <a:p>
-            <a:pPr marL="342900" indent="-342900">
-              <a:lnSpc>
-                <a:spcPts val="2430"/>
-              </a:lnSpc>
-              <a:buSzPct val="100000"/>
-              <a:buChar char="•"/>
-            </a:pPr>
-            <a:r>
-              <a:rPr lang="en-US" sz="1350" b="1" dirty="0" smtClean="0">
-                <a:solidFill>
-                  <a:srgbClr val="38BDF8"/>
-                </a:solidFill>
-                <a:latin typeface="Arial Rounded MT Bold" panose="020F0704030504030204" pitchFamily="34" charset="0"/>
-                <a:ea typeface="Arial" pitchFamily="34" charset="-122"/>
-                <a:cs typeface="Arial" pitchFamily="34" charset="-120"/>
-              </a:rPr>
-              <a:t>Free </a:t>
-            </a:r>
-            <a:r>
-              <a:rPr lang="en-US" sz="1350" b="1" dirty="0" err="1" smtClean="0">
-                <a:solidFill>
-                  <a:srgbClr val="38BDF8"/>
-                </a:solidFill>
-                <a:latin typeface="Arial Rounded MT Bold" panose="020F0704030504030204" pitchFamily="34" charset="0"/>
-                <a:ea typeface="Arial" pitchFamily="34" charset="-122"/>
-                <a:cs typeface="Arial" pitchFamily="34" charset="-120"/>
-              </a:rPr>
-              <a:t>Sulphur</a:t>
-            </a:r>
-            <a:r>
-              <a:rPr lang="en-US" sz="1350" b="1" dirty="0" smtClean="0">
-                <a:solidFill>
-                  <a:srgbClr val="38BDF8"/>
-                </a:solidFill>
-                <a:latin typeface="Arial Rounded MT Bold" panose="020F0704030504030204" pitchFamily="34" charset="0"/>
-                <a:ea typeface="Arial" pitchFamily="34" charset="-122"/>
-                <a:cs typeface="Arial" pitchFamily="34" charset="-120"/>
-              </a:rPr>
-              <a:t> Dioxide</a:t>
-            </a:r>
-            <a:r>
-              <a:rPr lang="en-US" sz="1350" b="1" dirty="0" smtClean="0">
-                <a:solidFill>
-                  <a:srgbClr val="38BDF8"/>
-                </a:solidFill>
-                <a:latin typeface="Arial Rounded MT Bold" panose="020F0704030504030204" pitchFamily="34" charset="0"/>
-                <a:ea typeface="Arial" pitchFamily="34" charset="-122"/>
-                <a:cs typeface="Arial" pitchFamily="34" charset="-120"/>
-              </a:rPr>
-              <a:t>:</a:t>
-            </a:r>
-            <a:r>
-              <a:rPr lang="en-US" sz="1350" dirty="0" smtClean="0">
-                <a:solidFill>
-                  <a:srgbClr val="CBD5E1"/>
-                </a:solidFill>
-                <a:latin typeface="Arial Rounded MT Bold" panose="020F0704030504030204" pitchFamily="34" charset="0"/>
-                <a:ea typeface="Arial" pitchFamily="34" charset="-122"/>
-                <a:cs typeface="Arial" pitchFamily="34" charset="-120"/>
-              </a:rPr>
-              <a:t> </a:t>
-            </a:r>
-            <a:r>
-              <a:rPr lang="en-US" sz="1350" dirty="0">
-                <a:solidFill>
-                  <a:srgbClr val="CBD5E1"/>
-                </a:solidFill>
-                <a:latin typeface="Arial Rounded MT Bold" panose="020F0704030504030204" pitchFamily="34" charset="0"/>
-                <a:ea typeface="Arial" pitchFamily="34" charset="-122"/>
-                <a:cs typeface="Arial" pitchFamily="34" charset="-120"/>
-              </a:rPr>
-              <a:t>Correlation = </a:t>
-            </a:r>
-            <a:r>
-              <a:rPr lang="en-IN" sz="1400" dirty="0">
-                <a:solidFill>
-                  <a:schemeClr val="bg1"/>
-                </a:solidFill>
-                <a:latin typeface="Arial Rounded MT Bold" panose="020F0704030504030204" pitchFamily="34" charset="0"/>
-              </a:rPr>
-              <a:t>-</a:t>
-            </a:r>
-            <a:r>
-              <a:rPr lang="en-IN" sz="1400" dirty="0" smtClean="0">
-                <a:solidFill>
-                  <a:schemeClr val="bg1"/>
-                </a:solidFill>
-                <a:latin typeface="Arial Rounded MT Bold" panose="020F0704030504030204" pitchFamily="34" charset="0"/>
-              </a:rPr>
-              <a:t>0.50656</a:t>
-            </a:r>
-            <a:r>
-              <a:rPr lang="en-US" sz="1350" dirty="0" smtClean="0">
-                <a:solidFill>
-                  <a:schemeClr val="bg1"/>
-                </a:solidFill>
-                <a:latin typeface="Arial Rounded MT Bold" panose="020F0704030504030204" pitchFamily="34" charset="0"/>
-                <a:ea typeface="Arial" pitchFamily="34" charset="-122"/>
-                <a:cs typeface="Arial" pitchFamily="34" charset="-120"/>
-              </a:rPr>
-              <a:t>        </a:t>
-            </a:r>
-            <a:r>
-              <a:rPr lang="en-US" sz="1350" dirty="0" smtClean="0">
-                <a:solidFill>
-                  <a:srgbClr val="CBD5E1"/>
-                </a:solidFill>
-                <a:latin typeface="Arial Rounded MT Bold" panose="020F0704030504030204" pitchFamily="34" charset="0"/>
-                <a:ea typeface="Arial" pitchFamily="34" charset="-122"/>
-                <a:cs typeface="Arial" pitchFamily="34" charset="-120"/>
-              </a:rPr>
-              <a:t>(Negative)</a:t>
+              <a:t> Correlation = 0.78 </a:t>
             </a:r>
             <a:endParaRPr lang="en-US" sz="1350" dirty="0" smtClean="0">
               <a:solidFill>
@@ -3191,6 +2666,47 @@
             </a:endParaRPr>
           </a:p>
           <a:p>
+            <a:pPr>
+              <a:lnSpc>
+                <a:spcPts val="2430"/>
+              </a:lnSpc>
+              <a:buSzPct val="100000"/>
+            </a:pPr>
+            <a:r>
+              <a:rPr lang="en-US" sz="1350" dirty="0" smtClean="0">
+                <a:solidFill>
+                  <a:srgbClr val="CBD5E1"/>
+                </a:solidFill>
+                <a:latin typeface="Arial Rounded MT Bold" panose="020F0704030504030204" pitchFamily="34" charset="0"/>
+                <a:ea typeface="Arial" pitchFamily="34" charset="-122"/>
+                <a:cs typeface="Arial" pitchFamily="34" charset="-120"/>
+              </a:rPr>
+              <a:t>        (</a:t>
+            </a:r>
+            <a:r>
+              <a:rPr lang="en-US" sz="1350" dirty="0">
+                <a:solidFill>
+                  <a:srgbClr val="CBD5E1"/>
+                </a:solidFill>
+                <a:latin typeface="Arial Rounded MT Bold" panose="020F0704030504030204" pitchFamily="34" charset="0"/>
+                <a:ea typeface="Arial" pitchFamily="34" charset="-122"/>
+                <a:cs typeface="Arial" pitchFamily="34" charset="-120"/>
+              </a:rPr>
+              <a:t>Strong positive</a:t>
+            </a:r>
+            <a:r>
+              <a:rPr lang="en-US" sz="1350" dirty="0" smtClean="0">
+                <a:solidFill>
+                  <a:srgbClr val="CBD5E1"/>
+                </a:solidFill>
+                <a:latin typeface="Arial Rounded MT Bold" panose="020F0704030504030204" pitchFamily="34" charset="0"/>
+                <a:ea typeface="Arial" pitchFamily="34" charset="-122"/>
+                <a:cs typeface="Arial" pitchFamily="34" charset="-120"/>
+              </a:rPr>
+              <a:t>)</a:t>
+            </a:r>
+          </a:p>
+          <a:p>
             <a:pPr marL="342900" indent="-342900">
               <a:lnSpc>
                 <a:spcPts val="2430"/>
@@ -3211,7 +2727,7 @@
               <a:buChar char="•"/>
             </a:pPr>
             <a:r>
-              <a:rPr lang="en-US" sz="1350" b="1" dirty="0" smtClean="0">
+              <a:rPr lang="en-US" sz="1350" b="1" dirty="0">
                 <a:solidFill>
                   <a:srgbClr val="38BDF8"/>
                 </a:solidFill>
@@ -3219,7 +2735,18 @@
                 <a:ea typeface="Arial" pitchFamily="34" charset="-122"/>
                 <a:cs typeface="Arial" pitchFamily="34" charset="-120"/>
               </a:rPr>
-              <a:t>Fixed Acidity:</a:t>
+              <a:t>Radio Advertising:</a:t>
+            </a:r>
+            <a:r>
+              <a:rPr lang="en-US" sz="1350" dirty="0">
+                <a:solidFill>
+                  <a:srgbClr val="CBD5E1"/>
+                </a:solidFill>
+                <a:latin typeface="Arial Rounded MT Bold" panose="020F0704030504030204" pitchFamily="34" charset="0"/>
+                <a:ea typeface="Arial" pitchFamily="34" charset="-122"/>
+                <a:cs typeface="Arial" pitchFamily="34" charset="-120"/>
+              </a:rPr>
+              <a:t> Correlation = </a:t>
             </a:r>
             <a:r>
               <a:rPr lang="en-US" sz="1350" dirty="0" smtClean="0">
@@ -3230,9 +2757,39 @@
                 <a:ea typeface="Arial" pitchFamily="34" charset="-122"/>
                 <a:cs typeface="Arial" pitchFamily="34" charset="-120"/>
               </a:rPr>
+              <a:t>0.58</a:t>
+            </a:r>
+          </a:p>
+          <a:p>
+            <a:pPr>
+              <a:lnSpc>
+                <a:spcPts val="2430"/>
+              </a:lnSpc>
+              <a:buSzPct val="100000"/>
+            </a:pPr>
+            <a:r>
+              <a:rPr lang="en-US" sz="1350" dirty="0">
+                <a:solidFill>
+                  <a:srgbClr val="CBD5E1"/>
+                </a:solidFill>
+                <a:latin typeface="Arial Rounded MT Bold" panose="020F0704030504030204" pitchFamily="34" charset="0"/>
+                <a:ea typeface="Arial" pitchFamily="34" charset="-122"/>
+                <a:cs typeface="Arial" pitchFamily="34" charset="-120"/>
+              </a:rPr>
               <a:t> </a:t>
             </a:r>
             <a:r>
+              <a:rPr lang="en-US" sz="1350" dirty="0" smtClean="0">
+                <a:solidFill>
+                  <a:srgbClr val="CBD5E1"/>
+                </a:solidFill>
+                <a:latin typeface="Arial Rounded MT Bold" panose="020F0704030504030204" pitchFamily="34" charset="0"/>
+                <a:ea typeface="Arial" pitchFamily="34" charset="-122"/>
+                <a:cs typeface="Arial" pitchFamily="34" charset="-120"/>
+              </a:rPr>
+              <a:t>       </a:t>
+            </a:r>
+            <a:r>
               <a:rPr lang="en-US" sz="1350" dirty="0">
                 <a:solidFill>
                   <a:srgbClr val="CBD5E1"/>
@@ -3241,7 +2798,7 @@
                 <a:ea typeface="Arial" pitchFamily="34" charset="-122"/>
                 <a:cs typeface="Arial" pitchFamily="34" charset="-120"/>
               </a:rPr>
-              <a:t>Correlation = </a:t>
+              <a:t>(Moderate positive</a:t>
             </a:r>
             <a:r>
               <a:rPr lang="en-US" sz="1350" dirty="0" smtClean="0">
@@ -3252,7 +2809,50 @@
                 <a:ea typeface="Arial" pitchFamily="34" charset="-122"/>
                 <a:cs typeface="Arial" pitchFamily="34" charset="-120"/>
               </a:rPr>
-              <a:t>0.124052 </a:t>
+              <a:t>)</a:t>
+            </a:r>
+          </a:p>
+          <a:p>
+            <a:pPr marL="342900" indent="-342900">
+              <a:lnSpc>
+                <a:spcPts val="2430"/>
+              </a:lnSpc>
+              <a:buSzPct val="100000"/>
+              <a:buChar char="•"/>
+            </a:pPr>
+            <a:endParaRPr lang="en-US" sz="1350" dirty="0">
+              <a:latin typeface="Arial Rounded MT Bold" panose="020F0704030504030204" pitchFamily="34" charset="0"/>
+            </a:endParaRPr>
+          </a:p>
+          <a:p>
+            <a:pPr marL="342900" indent="-342900">
+              <a:lnSpc>
+                <a:spcPts val="2430"/>
+              </a:lnSpc>
+              <a:buSzPct val="100000"/>
+              <a:buChar char="•"/>
+            </a:pPr>
+            <a:r>
+              <a:rPr lang="en-US" sz="1350" b="1" dirty="0">
+                <a:solidFill>
+                  <a:srgbClr val="38BDF8"/>
+                </a:solidFill>
+                <a:latin typeface="Arial Rounded MT Bold" panose="020F0704030504030204" pitchFamily="34" charset="0"/>
+                <a:ea typeface="Arial" pitchFamily="34" charset="-122"/>
+                <a:cs typeface="Arial" pitchFamily="34" charset="-120"/>
+              </a:rPr>
+              <a:t>Newspaper Advertising:</a:t>
+            </a:r>
+            <a:r>
+              <a:rPr lang="en-US" sz="1350" dirty="0">
+                <a:solidFill>
+                  <a:srgbClr val="CBD5E1"/>
+                </a:solidFill>
+                <a:latin typeface="Arial Rounded MT Bold" panose="020F0704030504030204" pitchFamily="34" charset="0"/>
+                <a:ea typeface="Arial" pitchFamily="34" charset="-122"/>
+                <a:cs typeface="Arial" pitchFamily="34" charset="-120"/>
+              </a:rPr>
+              <a:t> Correlation = 0.23 </a:t>
             </a:r>
             <a:endParaRPr lang="en-US" sz="1350" dirty="0" smtClean="0">
               <a:solidFill>
@@ -3300,7 +2900,7 @@
       </p:sp>
       <p:pic>
         <p:nvPicPr>
-          <p:cNvPr id="5" name="Picture 4"/>
+          <p:cNvPr id="4" name="Picture 3"/>
           <p:cNvPicPr>
             <a:picLocks noChangeAspect="1"/>
           </p:cNvPicPr>
@@ -3314,8 +2914,8 @@
         </p:blipFill>
         <p:spPr>
           <a:xfrm>
-            <a:off x="5085435" y="1611411"/>
-            <a:ext cx="3617293" cy="3156491"/>
+            <a:off x="5211097" y="1504336"/>
+            <a:ext cx="3727377" cy="3030328"/>
           </a:xfrm>
           <a:prstGeom prst="rect">
             <a:avLst/>
@@ -3357,13 +2957,65 @@
       </p:grpSpPr>
       <p:sp>
         <p:nvSpPr>
+          <p:cNvPr id="7" name="Text 0"/>
+          <p:cNvSpPr/>
+          <p:nvPr/>
+        </p:nvSpPr>
+        <p:spPr>
+          <a:xfrm>
+            <a:off x="216605" y="2793187"/>
+            <a:ext cx="4384891" cy="1503509"/>
+          </a:xfrm>
+          <a:prstGeom prst="rect">
+            <a:avLst/>
+          </a:prstGeom>
+          <a:solidFill>
+            <a:srgbClr val="1E293B"/>
+          </a:solidFill>
+          <a:ln>
+            <a:noFill/>
+          </a:ln>
+          <a:effectLst>
+            <a:outerShdw blurRad="190500" dist="228600" dir="2700000" algn="ctr">
+              <a:srgbClr val="000000">
+                <a:alpha val="30000"/>
+              </a:srgbClr>
+            </a:outerShdw>
+          </a:effectLst>
+          <a:scene3d>
+            <a:camera prst="orthographicFront">
+              <a:rot lat="0" lon="0" rev="0"/>
+            </a:camera>
+            <a:lightRig rig="glow" dir="t">
+              <a:rot lat="0" lon="0" rev="4800000"/>
+            </a:lightRig>
+          </a:scene3d>
+          <a:sp3d prstMaterial="matte">
+            <a:bevelT w="127000" h="63500"/>
+          </a:sp3d>
+        </p:spPr>
+        <p:txBody>
+          <a:bodyPr wrap="none" lIns="0" tIns="0" rIns="0" bIns="0" rtlCol="0" anchor="ctr">
+            <a:normAutofit/>
+          </a:bodyPr>
+          <a:lstStyle/>
+          <a:p>
+            <a:pPr marL="0" indent="0">
+              <a:buNone/>
+            </a:pPr>
+            <a:endParaRPr lang="en-US" dirty="0"/>
+          </a:p>
+        </p:txBody>
+      </p:sp>
+      <p:sp>
+        <p:nvSpPr>
           <p:cNvPr id="6" name="Text 0"/>
           <p:cNvSpPr/>
           <p:nvPr/>
         </p:nvSpPr>
         <p:spPr>
           <a:xfrm>
-            <a:off x="2104253" y="1943443"/>
+            <a:off x="216606" y="1540644"/>
             <a:ext cx="4384890" cy="927254"/>
           </a:xfrm>
           <a:prstGeom prst="rect">
@@ -3428,10 +3080,11 @@
           <a:bodyPr wrap="square" lIns="0" tIns="0" rIns="0" bIns="0" rtlCol="0" anchor="t"/>
           <a:lstStyle/>
           <a:p>
-            <a:pPr>
+            <a:pPr marL="0" indent="0">
               <a:lnSpc>
                 <a:spcPts val="3240"/>
               </a:lnSpc>
+              <a:buNone/>
             </a:pPr>
             <a:r>
               <a:rPr lang="en-US" sz="2700" b="1" dirty="0">
@@ -3442,29 +3095,9 @@
                 <a:ea typeface="Arial" pitchFamily="34" charset="-122"/>
                 <a:cs typeface="Arial" pitchFamily="34" charset="-120"/>
               </a:rPr>
-              <a:t>Q3: </a:t>
-            </a:r>
-            <a:r>
-              <a:rPr lang="en-US" sz="2800" dirty="0">
-                <a:solidFill>
-                  <a:schemeClr val="bg1"/>
-                </a:solidFill>
-              </a:rPr>
-              <a:t>Finding out average residual sugar in best quality and worst quality wine</a:t>
-            </a:r>
-            <a:r>
-              <a:rPr lang="en-US" sz="2800" dirty="0" smtClean="0">
-                <a:solidFill>
-                  <a:schemeClr val="bg1"/>
-                </a:solidFill>
-              </a:rPr>
-              <a:t>.</a:t>
-            </a:r>
-            <a:endParaRPr lang="en-US" sz="2700" dirty="0">
-              <a:solidFill>
-                <a:schemeClr val="bg1"/>
-              </a:solidFill>
-            </a:endParaRPr>
+              <a:t>Q3: Highest Impact on Sales</a:t>
+            </a:r>
+            <a:endParaRPr lang="en-US" sz="2700" dirty="0"/>
           </a:p>
         </p:txBody>
       </p:sp>
@@ -3476,7 +3109,7 @@
         </p:nvSpPr>
         <p:spPr>
           <a:xfrm>
-            <a:off x="2320268" y="2134140"/>
+            <a:off x="432621" y="1800167"/>
             <a:ext cx="3864077" cy="520245"/>
           </a:xfrm>
           <a:prstGeom prst="rect">
@@ -3489,36 +3122,252 @@
           <a:bodyPr wrap="square" lIns="0" tIns="0" rIns="0" bIns="0" rtlCol="0" anchor="t"/>
           <a:lstStyle/>
           <a:p>
-            <a:pPr>
+            <a:pPr marL="0" indent="0">
               <a:lnSpc>
                 <a:spcPts val="1350"/>
               </a:lnSpc>
-            </a:pPr>
+              <a:buNone/>
+            </a:pPr>
+            <a:r>
+              <a:rPr lang="en-US" sz="1600" b="1" dirty="0">
+                <a:solidFill>
+                  <a:srgbClr val="38BDF8"/>
+                </a:solidFill>
+                <a:latin typeface="Arial Rounded MT Bold" panose="020F0704030504030204" pitchFamily="34" charset="0"/>
+                <a:ea typeface="Arial" pitchFamily="34" charset="-122"/>
+                <a:cs typeface="Arial" pitchFamily="34" charset="-120"/>
+              </a:rPr>
+              <a:t>TV advertising</a:t>
+            </a:r>
             <a:r>
               <a:rPr lang="en-US" sz="1600" dirty="0">
                 <a:solidFill>
-                  <a:schemeClr val="bg1"/>
-                </a:solidFill>
-                <a:latin typeface="Arial Rounded MT Bold" panose="020F0704030504030204" pitchFamily="34" charset="0"/>
-              </a:rPr>
-              <a:t>Averages are similar (best: 2.58 g/L, worst: 2.64 g/L), suggesting minimal impact on extremes.</a:t>
-            </a:r>
-            <a:r>
-              <a:rPr lang="en-US" sz="1600" dirty="0"/>
-              <a:t/>
-            </a:r>
-            <a:br>
-              <a:rPr lang="en-US" sz="1600" dirty="0"/>
-            </a:br>
+                  <a:srgbClr val="CBD5E1"/>
+                </a:solidFill>
+                <a:latin typeface="Arial Rounded MT Bold" panose="020F0704030504030204" pitchFamily="34" charset="0"/>
+                <a:ea typeface="Arial" pitchFamily="34" charset="-122"/>
+                <a:cs typeface="Arial" pitchFamily="34" charset="-120"/>
+              </a:rPr>
+              <a:t> has the highest impact on sales with a correlation coefficient of 0.78.</a:t>
+            </a:r>
             <a:endParaRPr lang="en-US" sz="1600" dirty="0">
               <a:latin typeface="Arial Rounded MT Bold" panose="020F0704030504030204" pitchFamily="34" charset="0"/>
             </a:endParaRPr>
           </a:p>
         </p:txBody>
       </p:sp>
+      <p:sp>
+        <p:nvSpPr>
+          <p:cNvPr id="4" name="Text 2"/>
+          <p:cNvSpPr/>
+          <p:nvPr/>
+        </p:nvSpPr>
+        <p:spPr>
+          <a:xfrm>
+            <a:off x="432621" y="3073944"/>
+            <a:ext cx="4090219" cy="1206227"/>
+          </a:xfrm>
+          <a:prstGeom prst="rect">
+            <a:avLst/>
+          </a:prstGeom>
+          <a:noFill/>
+          <a:ln/>
+        </p:spPr>
+        <p:txBody>
+          <a:bodyPr wrap="square" lIns="0" tIns="0" rIns="0" bIns="0" rtlCol="0" anchor="t"/>
+          <a:lstStyle/>
+          <a:p>
+            <a:pPr marL="0" indent="0">
+              <a:lnSpc>
+                <a:spcPts val="1215"/>
+              </a:lnSpc>
+              <a:buNone/>
+            </a:pPr>
+            <a:r>
+              <a:rPr lang="en-US" sz="1600" dirty="0">
+                <a:solidFill>
+                  <a:srgbClr val="94A3B8"/>
+                </a:solidFill>
+                <a:latin typeface="Arial Rounded MT Bold" panose="020F0704030504030204" pitchFamily="34" charset="0"/>
+                <a:ea typeface="Arial" pitchFamily="34" charset="-122"/>
+                <a:cs typeface="Arial" pitchFamily="34" charset="-120"/>
+              </a:rPr>
+              <a:t>This indicates that every dollar spent </a:t>
+            </a:r>
+            <a:r>
+              <a:rPr lang="en-US" sz="1600" dirty="0" smtClean="0">
+                <a:solidFill>
+                  <a:srgbClr val="94A3B8"/>
+                </a:solidFill>
+                <a:latin typeface="Arial Rounded MT Bold" panose="020F0704030504030204" pitchFamily="34" charset="0"/>
+                <a:ea typeface="Arial" pitchFamily="34" charset="-122"/>
+                <a:cs typeface="Arial" pitchFamily="34" charset="-120"/>
+              </a:rPr>
+              <a:t>on</a:t>
+            </a:r>
+          </a:p>
+          <a:p>
+            <a:pPr marL="0" indent="0">
+              <a:lnSpc>
+                <a:spcPts val="1215"/>
+              </a:lnSpc>
+              <a:buNone/>
+            </a:pPr>
+            <a:endParaRPr lang="en-US" sz="1600" dirty="0">
+              <a:solidFill>
+                <a:srgbClr val="94A3B8"/>
+              </a:solidFill>
+              <a:latin typeface="Arial Rounded MT Bold" panose="020F0704030504030204" pitchFamily="34" charset="0"/>
+              <a:ea typeface="Arial" pitchFamily="34" charset="-122"/>
+              <a:cs typeface="Arial" pitchFamily="34" charset="-120"/>
+            </a:endParaRPr>
+          </a:p>
+          <a:p>
+            <a:pPr marL="0" indent="0">
+              <a:lnSpc>
+                <a:spcPts val="1215"/>
+              </a:lnSpc>
+              <a:buNone/>
+            </a:pPr>
+            <a:r>
+              <a:rPr lang="en-US" sz="1600" dirty="0" smtClean="0">
+                <a:solidFill>
+                  <a:srgbClr val="94A3B8"/>
+                </a:solidFill>
+                <a:latin typeface="Arial Rounded MT Bold" panose="020F0704030504030204" pitchFamily="34" charset="0"/>
+                <a:ea typeface="Arial" pitchFamily="34" charset="-122"/>
+                <a:cs typeface="Arial" pitchFamily="34" charset="-120"/>
+              </a:rPr>
+              <a:t>TV </a:t>
+            </a:r>
+            <a:r>
+              <a:rPr lang="en-US" sz="1600" dirty="0">
+                <a:solidFill>
+                  <a:srgbClr val="94A3B8"/>
+                </a:solidFill>
+                <a:latin typeface="Arial Rounded MT Bold" panose="020F0704030504030204" pitchFamily="34" charset="0"/>
+                <a:ea typeface="Arial" pitchFamily="34" charset="-122"/>
+                <a:cs typeface="Arial" pitchFamily="34" charset="-120"/>
+              </a:rPr>
+              <a:t>advertising has the strongest </a:t>
+            </a:r>
+            <a:endParaRPr lang="en-US" sz="1600" dirty="0" smtClean="0">
+              <a:solidFill>
+                <a:srgbClr val="94A3B8"/>
+              </a:solidFill>
+              <a:latin typeface="Arial Rounded MT Bold" panose="020F0704030504030204" pitchFamily="34" charset="0"/>
+              <a:ea typeface="Arial" pitchFamily="34" charset="-122"/>
+              <a:cs typeface="Arial" pitchFamily="34" charset="-120"/>
+            </a:endParaRPr>
+          </a:p>
+          <a:p>
+            <a:pPr marL="0" indent="0">
+              <a:lnSpc>
+                <a:spcPts val="1215"/>
+              </a:lnSpc>
+              <a:buNone/>
+            </a:pPr>
+            <a:endParaRPr lang="en-US" sz="1600" dirty="0">
+              <a:solidFill>
+                <a:srgbClr val="94A3B8"/>
+              </a:solidFill>
+              <a:latin typeface="Arial Rounded MT Bold" panose="020F0704030504030204" pitchFamily="34" charset="0"/>
+              <a:ea typeface="Arial" pitchFamily="34" charset="-122"/>
+              <a:cs typeface="Arial" pitchFamily="34" charset="-120"/>
+            </a:endParaRPr>
+          </a:p>
+          <a:p>
+            <a:pPr marL="0" indent="0">
+              <a:lnSpc>
+                <a:spcPts val="1215"/>
+              </a:lnSpc>
+              <a:buNone/>
+            </a:pPr>
+            <a:r>
+              <a:rPr lang="en-US" sz="1600" dirty="0" smtClean="0">
+                <a:solidFill>
+                  <a:srgbClr val="94A3B8"/>
+                </a:solidFill>
+                <a:latin typeface="Arial Rounded MT Bold" panose="020F0704030504030204" pitchFamily="34" charset="0"/>
+                <a:ea typeface="Arial" pitchFamily="34" charset="-122"/>
+                <a:cs typeface="Arial" pitchFamily="34" charset="-120"/>
+              </a:rPr>
+              <a:t>relationship </a:t>
+            </a:r>
+            <a:r>
+              <a:rPr lang="en-US" sz="1600" dirty="0">
+                <a:solidFill>
+                  <a:srgbClr val="94A3B8"/>
+                </a:solidFill>
+                <a:latin typeface="Arial Rounded MT Bold" panose="020F0704030504030204" pitchFamily="34" charset="0"/>
+                <a:ea typeface="Arial" pitchFamily="34" charset="-122"/>
+                <a:cs typeface="Arial" pitchFamily="34" charset="-120"/>
+              </a:rPr>
+              <a:t>with increased product sales </a:t>
+            </a:r>
+            <a:endParaRPr lang="en-US" sz="1600" dirty="0" smtClean="0">
+              <a:solidFill>
+                <a:srgbClr val="94A3B8"/>
+              </a:solidFill>
+              <a:latin typeface="Arial Rounded MT Bold" panose="020F0704030504030204" pitchFamily="34" charset="0"/>
+              <a:ea typeface="Arial" pitchFamily="34" charset="-122"/>
+              <a:cs typeface="Arial" pitchFamily="34" charset="-120"/>
+            </a:endParaRPr>
+          </a:p>
+          <a:p>
+            <a:pPr marL="0" indent="0">
+              <a:lnSpc>
+                <a:spcPts val="1215"/>
+              </a:lnSpc>
+              <a:buNone/>
+            </a:pPr>
+            <a:endParaRPr lang="en-US" sz="1600" dirty="0">
+              <a:solidFill>
+                <a:srgbClr val="94A3B8"/>
+              </a:solidFill>
+              <a:latin typeface="Arial Rounded MT Bold" panose="020F0704030504030204" pitchFamily="34" charset="0"/>
+              <a:ea typeface="Arial" pitchFamily="34" charset="-122"/>
+              <a:cs typeface="Arial" pitchFamily="34" charset="-120"/>
+            </a:endParaRPr>
+          </a:p>
+          <a:p>
+            <a:pPr marL="0" indent="0">
+              <a:lnSpc>
+                <a:spcPts val="1215"/>
+              </a:lnSpc>
+              <a:buNone/>
+            </a:pPr>
+            <a:r>
+              <a:rPr lang="en-US" sz="1600" dirty="0" smtClean="0">
+                <a:solidFill>
+                  <a:srgbClr val="94A3B8"/>
+                </a:solidFill>
+                <a:latin typeface="Arial Rounded MT Bold" panose="020F0704030504030204" pitchFamily="34" charset="0"/>
+                <a:ea typeface="Arial" pitchFamily="34" charset="-122"/>
+                <a:cs typeface="Arial" pitchFamily="34" charset="-120"/>
+              </a:rPr>
+              <a:t>compared </a:t>
+            </a:r>
+            <a:r>
+              <a:rPr lang="en-US" sz="1600" dirty="0">
+                <a:solidFill>
+                  <a:srgbClr val="94A3B8"/>
+                </a:solidFill>
+                <a:latin typeface="Arial Rounded MT Bold" panose="020F0704030504030204" pitchFamily="34" charset="0"/>
+                <a:ea typeface="Arial" pitchFamily="34" charset="-122"/>
+                <a:cs typeface="Arial" pitchFamily="34" charset="-120"/>
+              </a:rPr>
+              <a:t>to Radio and Newspaper.</a:t>
+            </a:r>
+            <a:endParaRPr lang="en-US" sz="1600" dirty="0">
+              <a:latin typeface="Arial Rounded MT Bold" panose="020F0704030504030204" pitchFamily="34" charset="0"/>
+            </a:endParaRPr>
+          </a:p>
+        </p:txBody>
+      </p:sp>
       <p:pic>
         <p:nvPicPr>
-          <p:cNvPr id="8" name="Picture 7"/>
+          <p:cNvPr id="5" name="Picture 4"/>
           <p:cNvPicPr>
             <a:picLocks noChangeAspect="1"/>
           </p:cNvPicPr>
@@ -3532,8 +3381,8 @@
         </p:blipFill>
         <p:spPr>
           <a:xfrm>
-            <a:off x="871982" y="3458883"/>
-            <a:ext cx="6849431" cy="1057423"/>
+            <a:off x="4837470" y="1359098"/>
+            <a:ext cx="4069009" cy="3577151"/>
           </a:xfrm>
           <a:prstGeom prst="rect">
             <a:avLst/>
@@ -3549,324 +3398,6 @@
 </file>
 
 <file path=ppt/slides/slide6.xml><?xml version="1.0" encoding="utf-8"?>
-<p:sld xmlns:a="http://schemas.openxmlformats.org/drawingml/2006/main" xmlns:r="http://schemas.openxmlformats.org/officeDocument/2006/relationships" xmlns:p="http://schemas.openxmlformats.org/presentationml/2006/main">
-  <p:cSld>
-    <p:bg>
-      <p:bgPr>
-        <a:solidFill>
-          <a:srgbClr val="0F172A"/>
-        </a:solidFill>
-        <a:effectLst/>
-      </p:bgPr>
-    </p:bg>
-    <p:spTree>
-      <p:nvGrpSpPr>
-        <p:cNvPr id="1" name=""/>
-        <p:cNvGrpSpPr/>
-        <p:nvPr/>
-      </p:nvGrpSpPr>
-      <p:grpSpPr>
-        <a:xfrm>
-          <a:off x="0" y="0"/>
-          <a:ext cx="0" cy="0"/>
-          <a:chOff x="0" y="0"/>
-          <a:chExt cx="0" cy="0"/>
-        </a:xfrm>
-      </p:grpSpPr>
-      <p:sp>
-        <p:nvSpPr>
-          <p:cNvPr id="6" name="Text 0"/>
-          <p:cNvSpPr/>
-          <p:nvPr/>
-        </p:nvSpPr>
-        <p:spPr>
-          <a:xfrm>
-            <a:off x="2104253" y="1684152"/>
-            <a:ext cx="4384890" cy="1238542"/>
-          </a:xfrm>
-          <a:prstGeom prst="rect">
-            <a:avLst/>
-          </a:prstGeom>
-          <a:solidFill>
-            <a:srgbClr val="1E293B"/>
-          </a:solidFill>
-          <a:ln>
-            <a:noFill/>
-          </a:ln>
-          <a:effectLst>
-            <a:outerShdw blurRad="190500" dist="228600" dir="2700000" algn="ctr">
-              <a:srgbClr val="000000">
-                <a:alpha val="30000"/>
-              </a:srgbClr>
-            </a:outerShdw>
-          </a:effectLst>
-          <a:scene3d>
-            <a:camera prst="orthographicFront">
-              <a:rot lat="0" lon="0" rev="0"/>
-            </a:camera>
-            <a:lightRig rig="glow" dir="t">
-              <a:rot lat="0" lon="0" rev="4800000"/>
-            </a:lightRig>
-          </a:scene3d>
-          <a:sp3d prstMaterial="matte">
-            <a:bevelT w="127000" h="63500"/>
-          </a:sp3d>
-        </p:spPr>
-        <p:txBody>
-          <a:bodyPr wrap="none" lIns="0" tIns="0" rIns="0" bIns="0" rtlCol="0" anchor="ctr">
-            <a:normAutofit/>
-          </a:bodyPr>
-          <a:lstStyle/>
-          <a:p>
-            <a:pPr marL="0" indent="0">
-              <a:buNone/>
-            </a:pPr>
-            <a:endParaRPr lang="en-US" dirty="0"/>
-          </a:p>
-        </p:txBody>
-      </p:sp>
-      <p:sp>
-        <p:nvSpPr>
-          <p:cNvPr id="2" name="Text 0"/>
-          <p:cNvSpPr/>
-          <p:nvPr/>
-        </p:nvSpPr>
-        <p:spPr>
-          <a:xfrm>
-            <a:off x="609600" y="609600"/>
-            <a:ext cx="8083296" cy="411361"/>
-          </a:xfrm>
-          <a:prstGeom prst="rect">
-            <a:avLst/>
-          </a:prstGeom>
-          <a:noFill/>
-          <a:ln/>
-        </p:spPr>
-        <p:txBody>
-          <a:bodyPr wrap="square" lIns="0" tIns="0" rIns="0" bIns="0" rtlCol="0" anchor="t"/>
-          <a:lstStyle/>
-          <a:p>
-            <a:pPr>
-              <a:lnSpc>
-                <a:spcPts val="3240"/>
-              </a:lnSpc>
-            </a:pPr>
-            <a:r>
-              <a:rPr lang="en-US" sz="2700" b="1" dirty="0" smtClean="0">
-                <a:solidFill>
-                  <a:srgbClr val="38BDF8"/>
-                </a:solidFill>
-                <a:latin typeface="Arial" pitchFamily="34" charset="0"/>
-                <a:ea typeface="Arial" pitchFamily="34" charset="-122"/>
-                <a:cs typeface="Arial" pitchFamily="34" charset="-120"/>
-              </a:rPr>
-              <a:t>Q4: </a:t>
-            </a:r>
-            <a:r>
-              <a:rPr lang="en-US" sz="2800" dirty="0">
-                <a:solidFill>
-                  <a:schemeClr val="bg1"/>
-                </a:solidFill>
-              </a:rPr>
-              <a:t>Affect of </a:t>
-            </a:r>
-            <a:r>
-              <a:rPr lang="en-US" sz="2800" dirty="0" smtClean="0">
-                <a:solidFill>
-                  <a:schemeClr val="bg1"/>
-                </a:solidFill>
-              </a:rPr>
-              <a:t>Volatile </a:t>
-            </a:r>
-            <a:r>
-              <a:rPr lang="en-US" sz="2800" dirty="0">
-                <a:solidFill>
-                  <a:schemeClr val="bg1"/>
-                </a:solidFill>
-              </a:rPr>
-              <a:t>Acidity on Quality of the wine.</a:t>
-            </a:r>
-            <a:endParaRPr lang="en-US" sz="2700" dirty="0">
-              <a:solidFill>
-                <a:schemeClr val="bg1"/>
-              </a:solidFill>
-            </a:endParaRPr>
-          </a:p>
-        </p:txBody>
-      </p:sp>
-      <p:sp>
-        <p:nvSpPr>
-          <p:cNvPr id="3" name="Text 1"/>
-          <p:cNvSpPr/>
-          <p:nvPr/>
-        </p:nvSpPr>
-        <p:spPr>
-          <a:xfrm>
-            <a:off x="2364658" y="1855138"/>
-            <a:ext cx="3864077" cy="890898"/>
-          </a:xfrm>
-          <a:prstGeom prst="rect">
-            <a:avLst/>
-          </a:prstGeom>
-          <a:noFill/>
-          <a:ln/>
-        </p:spPr>
-        <p:txBody>
-          <a:bodyPr wrap="square" lIns="0" tIns="0" rIns="0" bIns="0" rtlCol="0" anchor="t"/>
-          <a:lstStyle/>
-          <a:p>
-            <a:pPr>
-              <a:lnSpc>
-                <a:spcPts val="1350"/>
-              </a:lnSpc>
-            </a:pPr>
-            <a:r>
-              <a:rPr lang="en-US" sz="1600" dirty="0">
-                <a:solidFill>
-                  <a:schemeClr val="bg1"/>
-                </a:solidFill>
-                <a:latin typeface="Arial Rounded MT Bold" panose="020F0704030504030204" pitchFamily="34" charset="0"/>
-              </a:rPr>
-              <a:t>Volatile acidity negatively correlates </a:t>
-            </a:r>
-            <a:endParaRPr lang="en-US" sz="1600" dirty="0" smtClean="0">
-              <a:solidFill>
-                <a:schemeClr val="bg1"/>
-              </a:solidFill>
-              <a:latin typeface="Arial Rounded MT Bold" panose="020F0704030504030204" pitchFamily="34" charset="0"/>
-            </a:endParaRPr>
-          </a:p>
-          <a:p>
-            <a:pPr>
-              <a:lnSpc>
-                <a:spcPts val="1350"/>
-              </a:lnSpc>
-            </a:pPr>
-            <a:endParaRPr lang="en-US" sz="1600" dirty="0">
-              <a:solidFill>
-                <a:schemeClr val="bg1"/>
-              </a:solidFill>
-              <a:latin typeface="Arial Rounded MT Bold" panose="020F0704030504030204" pitchFamily="34" charset="0"/>
-            </a:endParaRPr>
-          </a:p>
-          <a:p>
-            <a:pPr>
-              <a:lnSpc>
-                <a:spcPts val="1350"/>
-              </a:lnSpc>
-            </a:pPr>
-            <a:r>
-              <a:rPr lang="en-US" sz="1600" dirty="0" smtClean="0">
-                <a:solidFill>
-                  <a:schemeClr val="bg1"/>
-                </a:solidFill>
-                <a:latin typeface="Arial Rounded MT Bold" panose="020F0704030504030204" pitchFamily="34" charset="0"/>
-              </a:rPr>
-              <a:t>with </a:t>
-            </a:r>
-            <a:r>
-              <a:rPr lang="en-US" sz="1600" dirty="0">
-                <a:solidFill>
-                  <a:schemeClr val="bg1"/>
-                </a:solidFill>
-                <a:latin typeface="Arial Rounded MT Bold" panose="020F0704030504030204" pitchFamily="34" charset="0"/>
-              </a:rPr>
-              <a:t>quality at -0.39, indicating </a:t>
-            </a:r>
-            <a:r>
-              <a:rPr lang="en-US" sz="1600" dirty="0" smtClean="0">
-                <a:solidFill>
-                  <a:schemeClr val="bg1"/>
-                </a:solidFill>
-                <a:latin typeface="Arial Rounded MT Bold" panose="020F0704030504030204" pitchFamily="34" charset="0"/>
-              </a:rPr>
-              <a:t>higher</a:t>
-            </a:r>
-          </a:p>
-          <a:p>
-            <a:pPr>
-              <a:lnSpc>
-                <a:spcPts val="1350"/>
-              </a:lnSpc>
-            </a:pPr>
-            <a:endParaRPr lang="en-US" sz="1600" dirty="0">
-              <a:solidFill>
-                <a:schemeClr val="bg1"/>
-              </a:solidFill>
-              <a:latin typeface="Arial Rounded MT Bold" panose="020F0704030504030204" pitchFamily="34" charset="0"/>
-            </a:endParaRPr>
-          </a:p>
-          <a:p>
-            <a:pPr>
-              <a:lnSpc>
-                <a:spcPts val="1350"/>
-              </a:lnSpc>
-            </a:pPr>
-            <a:r>
-              <a:rPr lang="en-US" sz="1600" dirty="0" smtClean="0">
-                <a:solidFill>
-                  <a:schemeClr val="bg1"/>
-                </a:solidFill>
-                <a:latin typeface="Arial Rounded MT Bold" panose="020F0704030504030204" pitchFamily="34" charset="0"/>
-              </a:rPr>
-              <a:t>acidity </a:t>
-            </a:r>
-            <a:r>
-              <a:rPr lang="en-US" sz="1600" dirty="0">
-                <a:solidFill>
-                  <a:schemeClr val="bg1"/>
-                </a:solidFill>
-                <a:latin typeface="Arial Rounded MT Bold" panose="020F0704030504030204" pitchFamily="34" charset="0"/>
-              </a:rPr>
-              <a:t>lowers quality.</a:t>
-            </a:r>
-            <a:endParaRPr lang="en-US" sz="1600" dirty="0">
-              <a:solidFill>
-                <a:schemeClr val="bg1"/>
-              </a:solidFill>
-              <a:latin typeface="Arial Rounded MT Bold" panose="020F0704030504030204" pitchFamily="34" charset="0"/>
-            </a:endParaRPr>
-          </a:p>
-        </p:txBody>
-      </p:sp>
-      <p:pic>
-        <p:nvPicPr>
-          <p:cNvPr id="4" name="Picture 3"/>
-          <p:cNvPicPr>
-            <a:picLocks noChangeAspect="1"/>
-          </p:cNvPicPr>
-          <p:nvPr/>
-        </p:nvPicPr>
-        <p:blipFill>
-          <a:blip r:embed="rId3"/>
-          <a:stretch>
-            <a:fillRect/>
-          </a:stretch>
-        </p:blipFill>
-        <p:spPr>
-          <a:xfrm>
-            <a:off x="2104253" y="3823811"/>
-            <a:ext cx="4353533" cy="209579"/>
-          </a:xfrm>
-          <a:prstGeom prst="rect">
-            <a:avLst/>
-          </a:prstGeom>
-        </p:spPr>
-      </p:pic>
-    </p:spTree>
-    <p:extLst>
-      <p:ext uri="{BB962C8B-B14F-4D97-AF65-F5344CB8AC3E}">
-        <p14:creationId xmlns:p14="http://schemas.microsoft.com/office/powerpoint/2010/main" val="2359054161"/>
-      </p:ext>
-    </p:extLst>
-  </p:cSld>
-  <p:clrMapOvr>
-    <a:masterClrMapping/>
-  </p:clrMapOvr>
-</p:sld>
-</file>
-
-<file path=ppt/slides/slide7.xml><?xml version="1.0" encoding="utf-8"?>
 <p:sld xmlns:a="http://schemas.openxmlformats.org/drawingml/2006/main" xmlns:r="http://schemas.openxmlformats.org/officeDocument/2006/relationships" xmlns:p="http://schemas.openxmlformats.org/presentationml/2006/main">
   <p:cSld name="Slide 6">
     <p:bg>
@@ -3961,6 +3492,17 @@
               <a:buNone/>
             </a:pPr>
             <a:r>
+              <a:rPr lang="en-US" sz="1600" dirty="0">
+                <a:solidFill>
+                  <a:srgbClr val="CBD5E1"/>
+                </a:solidFill>
+                <a:latin typeface="Arial Rounded MT Bold" panose="020F0704030504030204" pitchFamily="34" charset="0"/>
+                <a:ea typeface="Arial" pitchFamily="34" charset="-122"/>
+                <a:cs typeface="Arial" pitchFamily="34" charset="-120"/>
+              </a:rPr>
+              <a:t>A </a:t>
+            </a:r>
+            <a:r>
               <a:rPr lang="en-US" sz="1600" dirty="0" smtClean="0">
                 <a:solidFill>
                   <a:srgbClr val="CBD5E1"/>
@@ -3969,7 +3511,18 @@
                 <a:ea typeface="Arial" pitchFamily="34" charset="-122"/>
                 <a:cs typeface="Arial" pitchFamily="34" charset="-120"/>
               </a:rPr>
-              <a:t>A Decision Tree </a:t>
+              <a:t>linear </a:t>
+            </a:r>
+            <a:r>
+              <a:rPr lang="en-US" sz="1600" dirty="0">
+                <a:solidFill>
+                  <a:srgbClr val="CBD5E1"/>
+                </a:solidFill>
+                <a:latin typeface="Arial Rounded MT Bold" panose="020F0704030504030204" pitchFamily="34" charset="0"/>
+                <a:ea typeface="Arial" pitchFamily="34" charset="-122"/>
+                <a:cs typeface="Arial" pitchFamily="34" charset="-120"/>
+              </a:rPr>
+              <a:t>regression model was </a:t>
             </a:r>
             <a:r>
               <a:rPr lang="en-US" sz="1600" dirty="0" smtClean="0">
@@ -3980,18 +3533,7 @@
                 <a:ea typeface="Arial" pitchFamily="34" charset="-122"/>
                 <a:cs typeface="Arial" pitchFamily="34" charset="-120"/>
               </a:rPr>
-              <a:t>C</a:t>
-            </a:r>
-            <a:r>
-              <a:rPr lang="en-US" sz="1600" dirty="0" smtClean="0">
-                <a:solidFill>
-                  <a:srgbClr val="CBD5E1"/>
-                </a:solidFill>
-                <a:latin typeface="Arial Rounded MT Bold" panose="020F0704030504030204" pitchFamily="34" charset="0"/>
-                <a:ea typeface="Arial" pitchFamily="34" charset="-122"/>
-                <a:cs typeface="Arial" pitchFamily="34" charset="-120"/>
-              </a:rPr>
-              <a:t>lassifier Model and a </a:t>
+              <a:t>built</a:t>
             </a:r>
           </a:p>
           <a:p>
@@ -4026,17 +3568,20 @@
                 <a:ea typeface="Arial" pitchFamily="34" charset="-122"/>
                 <a:cs typeface="Arial" pitchFamily="34" charset="-120"/>
               </a:rPr>
-              <a:t>Random Forest Classifier Model was trained </a:t>
-            </a:r>
-          </a:p>
-          <a:p>
-            <a:pPr marL="0" indent="0">
-              <a:lnSpc>
-                <a:spcPts val="1215"/>
-              </a:lnSpc>
-              <a:buNone/>
-            </a:pPr>
-            <a:endParaRPr lang="en-US" sz="1600" dirty="0">
+              <a:t>using </a:t>
+            </a:r>
+            <a:r>
+              <a:rPr lang="en-US" sz="1600" dirty="0">
+                <a:solidFill>
+                  <a:srgbClr val="CBD5E1"/>
+                </a:solidFill>
+                <a:latin typeface="Arial Rounded MT Bold" panose="020F0704030504030204" pitchFamily="34" charset="0"/>
+                <a:ea typeface="Arial" pitchFamily="34" charset="-122"/>
+                <a:cs typeface="Arial" pitchFamily="34" charset="-120"/>
+              </a:rPr>
+              <a:t>all three advertising variables (TV, </a:t>
+            </a:r>
+            <a:endParaRPr lang="en-US" sz="1600" dirty="0" smtClean="0">
               <a:solidFill>
                 <a:srgbClr val="CBD5E1"/>
               </a:solidFill>
@@ -4052,26 +3597,7 @@
               </a:lnSpc>
               <a:buNone/>
             </a:pPr>
-            <a:r>
-              <a:rPr lang="en-US" sz="1600" dirty="0" smtClean="0">
-                <a:solidFill>
-                  <a:srgbClr val="CBD5E1"/>
-                </a:solidFill>
-                <a:latin typeface="Arial Rounded MT Bold" panose="020F0704030504030204" pitchFamily="34" charset="0"/>
-                <a:ea typeface="Arial" pitchFamily="34" charset="-122"/>
-                <a:cs typeface="Arial" pitchFamily="34" charset="-120"/>
-              </a:rPr>
-              <a:t>on the data to find out which one performs </a:t>
-            </a:r>
-          </a:p>
-          <a:p>
-            <a:pPr marL="0" indent="0">
-              <a:lnSpc>
-                <a:spcPts val="1215"/>
-              </a:lnSpc>
-              <a:buNone/>
-            </a:pPr>
-            <a:endParaRPr lang="en-US" sz="1600" dirty="0">
+            <a:endParaRPr lang="en-US" sz="1600" dirty="0" smtClean="0">
               <a:solidFill>
                 <a:srgbClr val="CBD5E1"/>
               </a:solidFill>
@@ -4096,7 +3622,18 @@
                 <a:ea typeface="Arial" pitchFamily="34" charset="-122"/>
                 <a:cs typeface="Arial" pitchFamily="34" charset="-120"/>
               </a:rPr>
-              <a:t>the best</a:t>
+              <a:t>Radio</a:t>
+            </a:r>
+            <a:r>
+              <a:rPr lang="en-US" sz="1600" dirty="0">
+                <a:solidFill>
+                  <a:srgbClr val="CBD5E1"/>
+                </a:solidFill>
+                <a:latin typeface="Arial Rounded MT Bold" panose="020F0704030504030204" pitchFamily="34" charset="0"/>
+                <a:ea typeface="Arial" pitchFamily="34" charset="-122"/>
+                <a:cs typeface="Arial" pitchFamily="34" charset="-120"/>
+              </a:rPr>
+              <a:t>, Newspaper) to predict sales.</a:t>
             </a:r>
             <a:endParaRPr lang="en-US" sz="1600" dirty="0">
               <a:latin typeface="Arial Rounded MT Bold" panose="020F0704030504030204" pitchFamily="34" charset="0"/>
@@ -4239,33 +3776,25 @@
               <a:buChar char="•"/>
             </a:pPr>
             <a:r>
-              <a:rPr lang="en-US" sz="1600" dirty="0" smtClean="0">
-                <a:solidFill>
-                  <a:srgbClr val="CBD5E1"/>
-                </a:solidFill>
-                <a:latin typeface="Arial Rounded MT Bold" panose="020F0704030504030204" pitchFamily="34" charset="0"/>
-                <a:ea typeface="Arial" pitchFamily="34" charset="-122"/>
-                <a:cs typeface="Arial" pitchFamily="34" charset="-120"/>
-              </a:rPr>
-              <a:t>Confusio</a:t>
-            </a:r>
-            <a:r>
-              <a:rPr lang="en-US" sz="1600" dirty="0" smtClean="0">
-                <a:solidFill>
-                  <a:srgbClr val="CBD5E1"/>
-                </a:solidFill>
-                <a:latin typeface="Arial Rounded MT Bold" panose="020F0704030504030204" pitchFamily="34" charset="0"/>
-                <a:ea typeface="Arial" pitchFamily="34" charset="-122"/>
-                <a:cs typeface="Arial" pitchFamily="34" charset="-120"/>
-              </a:rPr>
-              <a:t>n Matrix was also visualized</a:t>
-            </a:r>
+              <a:rPr lang="en-US" sz="1600" dirty="0">
+                <a:solidFill>
+                  <a:srgbClr val="CBD5E1"/>
+                </a:solidFill>
+                <a:latin typeface="Arial Rounded MT Bold" panose="020F0704030504030204" pitchFamily="34" charset="0"/>
+                <a:ea typeface="Arial" pitchFamily="34" charset="-122"/>
+                <a:cs typeface="Arial" pitchFamily="34" charset="-120"/>
+              </a:rPr>
+              <a:t>Model captures the relationship effectively</a:t>
+            </a:r>
+            <a:endParaRPr lang="en-US" sz="1600" dirty="0">
+              <a:latin typeface="Arial Rounded MT Bold" panose="020F0704030504030204" pitchFamily="34" charset="0"/>
+            </a:endParaRPr>
           </a:p>
         </p:txBody>
       </p:sp>
       <p:pic>
         <p:nvPicPr>
-          <p:cNvPr id="6" name="Picture 5"/>
+          <p:cNvPr id="5" name="Picture 4"/>
           <p:cNvPicPr>
             <a:picLocks noChangeAspect="1"/>
           </p:cNvPicPr>
@@ -4279,8 +3808,8 @@
         </p:blipFill>
         <p:spPr>
           <a:xfrm>
-            <a:off x="5031850" y="1237713"/>
-            <a:ext cx="3839111" cy="3258005"/>
+            <a:off x="5043948" y="1867977"/>
+            <a:ext cx="3919690" cy="3120447"/>
           </a:xfrm>
           <a:prstGeom prst="rect">
             <a:avLst/>
@@ -4295,7 +3824,7 @@
 </p:sld>
 </file>
 
-<file path=ppt/slides/slide8.xml><?xml version="1.0" encoding="utf-8"?>
+<file path=ppt/slides/slide7.xml><?xml version="1.0" encoding="utf-8"?>
 <p:sld xmlns:a="http://schemas.openxmlformats.org/drawingml/2006/main" xmlns:r="http://schemas.openxmlformats.org/officeDocument/2006/relationships" xmlns:p="http://schemas.openxmlformats.org/presentationml/2006/main">
   <p:cSld name="Slide 7">
     <p:bg>
@@ -4506,6 +4035,232 @@
           <a:xfrm>
             <a:off x="2797128" y="3220507"/>
             <a:ext cx="3319148" cy="363794"/>
+          </a:xfrm>
+          <a:prstGeom prst="rect">
+            <a:avLst/>
+          </a:prstGeom>
+        </p:spPr>
+      </p:pic>
+    </p:spTree>
+  </p:cSld>
+  <p:clrMapOvr>
+    <a:masterClrMapping/>
+  </p:clrMapOvr>
+</p:sld>
+</file>
+
+<file path=ppt/slides/slide8.xml><?xml version="1.0" encoding="utf-8"?>
+<p:sld xmlns:a="http://schemas.openxmlformats.org/drawingml/2006/main" xmlns:r="http://schemas.openxmlformats.org/officeDocument/2006/relationships" xmlns:p="http://schemas.openxmlformats.org/presentationml/2006/main">
+  <p:cSld name="Slide 8">
+    <p:bg>
+      <p:bgPr>
+        <a:solidFill>
+          <a:srgbClr val="0F172A"/>
+        </a:solidFill>
+        <a:effectLst/>
+      </p:bgPr>
+    </p:bg>
+    <p:spTree>
+      <p:nvGrpSpPr>
+        <p:cNvPr id="1" name=""/>
+        <p:cNvGrpSpPr/>
+        <p:nvPr/>
+      </p:nvGrpSpPr>
+      <p:grpSpPr>
+        <a:xfrm>
+          <a:off x="0" y="0"/>
+          <a:ext cx="0" cy="0"/>
+          <a:chOff x="0" y="0"/>
+          <a:chExt cx="0" cy="0"/>
+        </a:xfrm>
+      </p:grpSpPr>
+      <p:sp>
+        <p:nvSpPr>
+          <p:cNvPr id="2" name="Text 0"/>
+          <p:cNvSpPr/>
+          <p:nvPr/>
+        </p:nvSpPr>
+        <p:spPr>
+          <a:xfrm>
+            <a:off x="609600" y="609600"/>
+            <a:ext cx="8083296" cy="411361"/>
+          </a:xfrm>
+          <a:prstGeom prst="rect">
+            <a:avLst/>
+          </a:prstGeom>
+          <a:noFill/>
+          <a:ln/>
+        </p:spPr>
+        <p:txBody>
+          <a:bodyPr wrap="square" lIns="0" tIns="0" rIns="0" bIns="0" rtlCol="0" anchor="t"/>
+          <a:lstStyle/>
+          <a:p>
+            <a:pPr marL="0" indent="0">
+              <a:lnSpc>
+                <a:spcPts val="3240"/>
+              </a:lnSpc>
+              <a:buNone/>
+            </a:pPr>
+            <a:r>
+              <a:rPr lang="en-US" sz="2700" b="1" dirty="0">
+                <a:solidFill>
+                  <a:srgbClr val="38BDF8"/>
+                </a:solidFill>
+                <a:latin typeface="Arial" pitchFamily="34" charset="0"/>
+                <a:ea typeface="Arial" pitchFamily="34" charset="-122"/>
+                <a:cs typeface="Arial" pitchFamily="34" charset="-120"/>
+              </a:rPr>
+              <a:t>Q6: Normalized Dataset Performance</a:t>
+            </a:r>
+            <a:endParaRPr lang="en-US" sz="2700" dirty="0"/>
+          </a:p>
+        </p:txBody>
+      </p:sp>
+      <p:sp>
+        <p:nvSpPr>
+          <p:cNvPr id="3" name="Text 1"/>
+          <p:cNvSpPr/>
+          <p:nvPr/>
+        </p:nvSpPr>
+        <p:spPr>
+          <a:xfrm>
+            <a:off x="609600" y="1249561"/>
+            <a:ext cx="8083296" cy="200025"/>
+          </a:xfrm>
+          <a:prstGeom prst="rect">
+            <a:avLst/>
+          </a:prstGeom>
+          <a:noFill/>
+          <a:ln/>
+        </p:spPr>
+        <p:txBody>
+          <a:bodyPr wrap="square" lIns="0" tIns="0" rIns="0" bIns="0" rtlCol="0" anchor="t"/>
+          <a:lstStyle/>
+          <a:p>
+            <a:pPr marL="0" indent="0">
+              <a:lnSpc>
+                <a:spcPts val="1215"/>
+              </a:lnSpc>
+              <a:buNone/>
+            </a:pPr>
+            <a:r>
+              <a:rPr lang="en-US" sz="1350" dirty="0">
+                <a:solidFill>
+                  <a:srgbClr val="CBD5E1"/>
+                </a:solidFill>
+                <a:latin typeface="Arial" pitchFamily="34" charset="0"/>
+                <a:ea typeface="Arial" pitchFamily="34" charset="-122"/>
+                <a:cs typeface="Arial" pitchFamily="34" charset="-120"/>
+              </a:rPr>
+              <a:t>When the dataset is normalized, the linear regression model performance typically:</a:t>
+            </a:r>
+            <a:endParaRPr lang="en-US" sz="1350" dirty="0"/>
+          </a:p>
+        </p:txBody>
+      </p:sp>
+      <p:sp>
+        <p:nvSpPr>
+          <p:cNvPr id="4" name="Text 2"/>
+          <p:cNvSpPr/>
+          <p:nvPr/>
+        </p:nvSpPr>
+        <p:spPr>
+          <a:xfrm>
+            <a:off x="914400" y="1601986"/>
+            <a:ext cx="7620000" cy="1154162"/>
+          </a:xfrm>
+          <a:prstGeom prst="rect">
+            <a:avLst/>
+          </a:prstGeom>
+          <a:noFill/>
+          <a:ln/>
+        </p:spPr>
+        <p:txBody>
+          <a:bodyPr wrap="square" lIns="0" tIns="0" rIns="0" bIns="0" rtlCol="0" anchor="t"/>
+          <a:lstStyle/>
+          <a:p>
+            <a:pPr marL="342900" indent="-342900">
+              <a:lnSpc>
+                <a:spcPts val="2430"/>
+              </a:lnSpc>
+              <a:buSzPct val="100000"/>
+              <a:buChar char="•"/>
+            </a:pPr>
+            <a:r>
+              <a:rPr lang="en-US" sz="1350" dirty="0">
+                <a:solidFill>
+                  <a:srgbClr val="CBD5E1"/>
+                </a:solidFill>
+                <a:latin typeface="Arial" pitchFamily="34" charset="0"/>
+                <a:ea typeface="Arial" pitchFamily="34" charset="-122"/>
+                <a:cs typeface="Arial" pitchFamily="34" charset="-120"/>
+              </a:rPr>
+              <a:t>Maintains similar accuracy (R² score)</a:t>
+            </a:r>
+            <a:endParaRPr lang="en-US" sz="1350" dirty="0"/>
+          </a:p>
+          <a:p>
+            <a:pPr marL="342900" indent="-342900">
+              <a:lnSpc>
+                <a:spcPts val="2430"/>
+              </a:lnSpc>
+              <a:buSzPct val="100000"/>
+              <a:buChar char="•"/>
+            </a:pPr>
+            <a:r>
+              <a:rPr lang="en-US" sz="1350" dirty="0">
+                <a:solidFill>
+                  <a:srgbClr val="CBD5E1"/>
+                </a:solidFill>
+                <a:latin typeface="Arial" pitchFamily="34" charset="0"/>
+                <a:ea typeface="Arial" pitchFamily="34" charset="-122"/>
+                <a:cs typeface="Arial" pitchFamily="34" charset="-120"/>
+              </a:rPr>
+              <a:t>Coefficients become more comparable</a:t>
+            </a:r>
+            <a:endParaRPr lang="en-US" sz="1350" dirty="0"/>
+          </a:p>
+          <a:p>
+            <a:pPr marL="342900" indent="-342900">
+              <a:lnSpc>
+                <a:spcPts val="2430"/>
+              </a:lnSpc>
+              <a:buSzPct val="100000"/>
+              <a:buChar char="•"/>
+            </a:pPr>
+            <a:r>
+              <a:rPr lang="en-US" sz="1350" dirty="0">
+                <a:solidFill>
+                  <a:srgbClr val="CBD5E1"/>
+                </a:solidFill>
+                <a:latin typeface="Arial" pitchFamily="34" charset="0"/>
+                <a:ea typeface="Arial" pitchFamily="34" charset="-122"/>
+                <a:cs typeface="Arial" pitchFamily="34" charset="-120"/>
+              </a:rPr>
+              <a:t>Training convergence may improve</a:t>
+            </a:r>
+            <a:endParaRPr lang="en-US" sz="1350" dirty="0"/>
+          </a:p>
+        </p:txBody>
+      </p:sp>
+      <p:pic>
+        <p:nvPicPr>
+          <p:cNvPr id="5" name="Picture 4"/>
+          <p:cNvPicPr>
+            <a:picLocks noChangeAspect="1"/>
+          </p:cNvPicPr>
+          <p:nvPr/>
+        </p:nvPicPr>
+        <p:blipFill>
+          <a:blip r:embed="rId3"/>
+          <a:stretch>
+            <a:fillRect/>
+          </a:stretch>
+        </p:blipFill>
+        <p:spPr>
+          <a:xfrm>
+            <a:off x="2679472" y="3333113"/>
+            <a:ext cx="3554460" cy="530957"/>
           </a:xfrm>
           <a:prstGeom prst="rect">
             <a:avLst/>
@@ -4573,7 +4328,7 @@
               <a:buNone/>
             </a:pPr>
             <a:r>
-              <a:rPr lang="en-US" sz="2700" b="1" dirty="0" smtClean="0">
+              <a:rPr lang="en-US" sz="2700" b="1" dirty="0">
                 <a:solidFill>
                   <a:srgbClr val="38BDF8"/>
                 </a:solidFill>
@@ -4581,7 +4336,7 @@
                 <a:ea typeface="Arial" pitchFamily="34" charset="-122"/>
                 <a:cs typeface="Arial" pitchFamily="34" charset="-120"/>
               </a:rPr>
-              <a:t>Result and Final Insights</a:t>
+              <a:t>Q7: Radio &amp; Newspaper Only</a:t>
             </a:r>
             <a:endParaRPr lang="en-US" sz="2700" dirty="0"/>
           </a:p>
@@ -4623,18 +4378,7 @@
                 <a:ea typeface="Arial" pitchFamily="34" charset="-122"/>
                 <a:cs typeface="Arial" pitchFamily="34" charset="-120"/>
               </a:rPr>
-              <a:t>When </a:t>
-            </a:r>
-            <a:r>
-              <a:rPr lang="en-US" sz="1350" dirty="0" smtClean="0">
-                <a:solidFill>
-                  <a:srgbClr val="CBD5E1"/>
-                </a:solidFill>
-                <a:latin typeface="Arial" pitchFamily="34" charset="0"/>
-                <a:ea typeface="Arial" pitchFamily="34" charset="-122"/>
-                <a:cs typeface="Arial" pitchFamily="34" charset="-120"/>
-              </a:rPr>
-              <a:t>Both the models were compared, we found out:</a:t>
+              <a:t>When only Radio and Newspaper advertising are used as predictors:</a:t>
             </a:r>
             <a:endParaRPr lang="en-US" sz="1350" dirty="0"/>
           </a:p>
@@ -4669,33 +4413,17 @@
               <a:buChar char="•"/>
             </a:pPr>
             <a:r>
-              <a:rPr lang="en-US" sz="1350" dirty="0" smtClean="0">
-                <a:solidFill>
-                  <a:schemeClr val="bg1"/>
-                </a:solidFill>
-                <a:latin typeface="Arial Rounded MT Bold" panose="020F0704030504030204" pitchFamily="34" charset="0"/>
-                <a:ea typeface="Arial" pitchFamily="34" charset="-122"/>
-                <a:cs typeface="Arial" pitchFamily="34" charset="-120"/>
-              </a:rPr>
-              <a:t>Random Forest is better than Decisio</a:t>
-            </a:r>
-            <a:r>
-              <a:rPr lang="en-US" sz="1350" dirty="0" smtClean="0">
-                <a:solidFill>
-                  <a:schemeClr val="bg1"/>
-                </a:solidFill>
-                <a:latin typeface="Arial Rounded MT Bold" panose="020F0704030504030204" pitchFamily="34" charset="0"/>
-                <a:ea typeface="Arial" pitchFamily="34" charset="-122"/>
-                <a:cs typeface="Arial" pitchFamily="34" charset="-120"/>
-              </a:rPr>
-              <a:t>n Tree</a:t>
-            </a:r>
-            <a:endParaRPr lang="en-US" sz="1350" dirty="0">
-              <a:solidFill>
-                <a:schemeClr val="bg1"/>
-              </a:solidFill>
-              <a:latin typeface="Arial Rounded MT Bold" panose="020F0704030504030204" pitchFamily="34" charset="0"/>
-            </a:endParaRPr>
+              <a:rPr lang="en-US" sz="1350" dirty="0">
+                <a:solidFill>
+                  <a:srgbClr val="CBD5E1"/>
+                </a:solidFill>
+                <a:latin typeface="Arial" pitchFamily="34" charset="0"/>
+                <a:ea typeface="Arial" pitchFamily="34" charset="-122"/>
+                <a:cs typeface="Arial" pitchFamily="34" charset="-120"/>
+              </a:rPr>
+              <a:t>Model accuracy decreases significantly</a:t>
+            </a:r>
+            <a:endParaRPr lang="en-US" sz="1350" dirty="0"/>
           </a:p>
           <a:p>
             <a:pPr marL="342900" indent="-342900">
@@ -4706,41 +4434,17 @@
               <a:buChar char="•"/>
             </a:pPr>
             <a:r>
-              <a:rPr lang="en-US" sz="1400" dirty="0">
-                <a:solidFill>
-                  <a:schemeClr val="bg1"/>
-                </a:solidFill>
-                <a:latin typeface="Arial Rounded MT Bold" panose="020F0704030504030204" pitchFamily="34" charset="0"/>
-              </a:rPr>
-              <a:t>Alcohol and </a:t>
-            </a:r>
-            <a:r>
-              <a:rPr lang="en-US" sz="1400" dirty="0" err="1">
-                <a:solidFill>
-                  <a:schemeClr val="bg1"/>
-                </a:solidFill>
-                <a:latin typeface="Arial Rounded MT Bold" panose="020F0704030504030204" pitchFamily="34" charset="0"/>
-              </a:rPr>
-              <a:t>sulphates</a:t>
-            </a:r>
-            <a:r>
-              <a:rPr lang="en-US" sz="1400" dirty="0">
-                <a:solidFill>
-                  <a:schemeClr val="bg1"/>
-                </a:solidFill>
-                <a:latin typeface="Arial Rounded MT Bold" panose="020F0704030504030204" pitchFamily="34" charset="0"/>
-              </a:rPr>
-              <a:t> positively influence quality; volatile acidity harms </a:t>
-            </a:r>
-            <a:r>
-              <a:rPr lang="en-US" sz="1400" dirty="0" smtClean="0">
-                <a:solidFill>
-                  <a:schemeClr val="bg1"/>
-                </a:solidFill>
-                <a:latin typeface="Arial Rounded MT Bold" panose="020F0704030504030204" pitchFamily="34" charset="0"/>
-              </a:rPr>
-              <a:t>it</a:t>
-            </a:r>
+              <a:rPr lang="en-US" sz="1350" dirty="0">
+                <a:solidFill>
+                  <a:srgbClr val="CBD5E1"/>
+                </a:solidFill>
+                <a:latin typeface="Arial" pitchFamily="34" charset="0"/>
+                <a:ea typeface="Arial" pitchFamily="34" charset="-122"/>
+                <a:cs typeface="Arial" pitchFamily="34" charset="-120"/>
+              </a:rPr>
+              <a:t>TV advertising was the strongest predictor</a:t>
+            </a:r>
+            <a:endParaRPr lang="en-US" sz="1350" dirty="0"/>
           </a:p>
           <a:p>
             <a:pPr marL="342900" indent="-342900">
@@ -4751,81 +4455,23 @@
               <a:buChar char="•"/>
             </a:pPr>
             <a:r>
-              <a:rPr lang="en-US" sz="1400" dirty="0">
-                <a:solidFill>
-                  <a:schemeClr val="bg1"/>
-                </a:solidFill>
-                <a:latin typeface="Arial Rounded MT Bold" panose="020F0704030504030204" pitchFamily="34" charset="0"/>
-              </a:rPr>
-              <a:t>Random Forest (71.9% accuracy) is superior for this classification </a:t>
-            </a:r>
-            <a:r>
-              <a:rPr lang="en-US" sz="1400" dirty="0" smtClean="0">
-                <a:solidFill>
-                  <a:schemeClr val="bg1"/>
-                </a:solidFill>
-                <a:latin typeface="Arial Rounded MT Bold" panose="020F0704030504030204" pitchFamily="34" charset="0"/>
-              </a:rPr>
-              <a:t>task.</a:t>
-            </a:r>
-          </a:p>
-          <a:p>
-            <a:pPr marL="342900" indent="-342900">
-              <a:lnSpc>
-                <a:spcPts val="2430"/>
-              </a:lnSpc>
-              <a:buSzPct val="100000"/>
-              <a:buChar char="•"/>
-            </a:pPr>
-            <a:r>
-              <a:rPr lang="en-US" sz="1400" dirty="0" smtClean="0">
-                <a:solidFill>
-                  <a:schemeClr val="bg1"/>
-                </a:solidFill>
-                <a:latin typeface="Arial Rounded MT Bold" panose="020F0704030504030204" pitchFamily="34" charset="0"/>
-              </a:rPr>
-              <a:t>Residual </a:t>
-            </a:r>
-            <a:r>
-              <a:rPr lang="en-US" sz="1400" dirty="0">
-                <a:solidFill>
-                  <a:schemeClr val="bg1"/>
-                </a:solidFill>
-                <a:latin typeface="Arial Rounded MT Bold" panose="020F0704030504030204" pitchFamily="34" charset="0"/>
-              </a:rPr>
-              <a:t>sugar shows negligible difference between best/worst wines.</a:t>
-            </a:r>
-          </a:p>
-          <a:p>
-            <a:r>
-              <a:rPr lang="en-US" sz="1400" dirty="0">
-                <a:solidFill>
-                  <a:schemeClr val="bg1"/>
-                </a:solidFill>
-                <a:latin typeface="Arial Rounded MT Bold" panose="020F0704030504030204" pitchFamily="34" charset="0"/>
-              </a:rPr>
-              <a:t/>
-            </a:r>
-            <a:br>
-              <a:rPr lang="en-US" sz="1400" dirty="0">
-                <a:solidFill>
-                  <a:schemeClr val="bg1"/>
-                </a:solidFill>
-                <a:latin typeface="Arial Rounded MT Bold" panose="020F0704030504030204" pitchFamily="34" charset="0"/>
-              </a:rPr>
-            </a:br>
-            <a:endParaRPr lang="en-US" sz="1350" dirty="0">
-              <a:solidFill>
-                <a:schemeClr val="bg1"/>
-              </a:solidFill>
-              <a:latin typeface="Arial Rounded MT Bold" panose="020F0704030504030204" pitchFamily="34" charset="0"/>
-            </a:endParaRPr>
+              <a:rPr lang="en-US" sz="1350" dirty="0">
+                <a:solidFill>
+                  <a:srgbClr val="CBD5E1"/>
+                </a:solidFill>
+                <a:latin typeface="Arial" pitchFamily="34" charset="0"/>
+                <a:ea typeface="Arial" pitchFamily="34" charset="-122"/>
+                <a:cs typeface="Arial" pitchFamily="34" charset="-120"/>
+              </a:rPr>
+              <a:t>Removing it reduces predictive power</a:t>
+            </a:r>
+            <a:endParaRPr lang="en-US" sz="1350" dirty="0"/>
           </a:p>
         </p:txBody>
       </p:sp>
       <p:pic>
         <p:nvPicPr>
-          <p:cNvPr id="6" name="Picture 5"/>
+          <p:cNvPr id="5" name="Picture 4"/>
           <p:cNvPicPr>
             <a:picLocks noChangeAspect="1"/>
           </p:cNvPicPr>
@@ -4839,8 +4485,8 @@
         </p:blipFill>
         <p:spPr>
           <a:xfrm>
-            <a:off x="2409213" y="3444025"/>
-            <a:ext cx="4401833" cy="892001"/>
+            <a:off x="3239100" y="3423291"/>
+            <a:ext cx="2410161" cy="333422"/>
           </a:xfrm>
           <a:prstGeom prst="rect">
             <a:avLst/>
